--- a/Y9_Exploring_Science/9B_Plant_growth/9B_L01_Reactions_in_plants.pptx
+++ b/Y9_Exploring_Science/9B_Plant_growth/9B_L01_Reactions_in_plants.pptx
@@ -1829,7 +1829,7 @@
         <p:spPr>
           <a:xfrm>
             <a:off x="548640" y="3657600"/>
-            <a:ext cx="10515600" cy="914400"/>
+            <a:ext cx="10515600" cy="1097280"/>
           </a:xfrm>
           <a:prstGeom prst="rect">
             <a:avLst/>
@@ -1842,7 +1842,7 @@
           <a:lstStyle>
             <a:lvl1pPr indent="0" marL="0">
               <a:buNone/>
-              <a:defRPr lang="en-US" sz="2000" dirty="0">
+              <a:defRPr lang="en-US" sz="2400" dirty="0">
                 <a:solidFill>
                   <a:srgbClr val="FFFFFF"/>
                 </a:solidFill>
@@ -1853,7 +1853,7 @@
             <a:pPr indent="0" marL="0">
               <a:buNone/>
             </a:pPr>
-            <a:endParaRPr lang="en-US" sz="2000" dirty="0"/>
+            <a:endParaRPr lang="en-US" sz="2400" dirty="0"/>
           </a:p>
         </p:txBody>
       </p:sp>
@@ -1953,14 +1953,14 @@
               <a:buNone/>
             </a:pPr>
             <a:r>
-              <a:rPr lang="en-US" sz="900" dirty="0">
+              <a:rPr lang="en-US" sz="1000" dirty="0">
                 <a:solidFill>
                   <a:srgbClr val="5B6574"/>
                 </a:solidFill>
               </a:rPr>
               <a:t>Year 9 Science  |  9B Plant growth  |  Lesson 1: Reactions in plants</a:t>
             </a:r>
-            <a:endParaRPr lang="en-US" sz="900" dirty="0"/>
+            <a:endParaRPr lang="en-US" sz="1000" dirty="0"/>
           </a:p>
         </p:txBody>
       </p:sp>
@@ -2129,14 +2129,14 @@
               <a:buNone/>
             </a:pPr>
             <a:r>
-              <a:rPr lang="en-US" sz="900" dirty="0">
+              <a:rPr lang="en-US" sz="1000" dirty="0">
                 <a:solidFill>
                   <a:srgbClr val="5B6574"/>
                 </a:solidFill>
               </a:rPr>
               <a:t>Year 9 Science  |  9B Plant growth  |  Lesson 1: Reactions in plants</a:t>
             </a:r>
-            <a:endParaRPr lang="en-US" sz="900" dirty="0"/>
+            <a:endParaRPr lang="en-US" sz="1000" dirty="0"/>
           </a:p>
         </p:txBody>
       </p:sp>
@@ -2305,14 +2305,14 @@
               <a:buNone/>
             </a:pPr>
             <a:r>
-              <a:rPr lang="en-US" sz="900" dirty="0">
+              <a:rPr lang="en-US" sz="1000" dirty="0">
                 <a:solidFill>
                   <a:srgbClr val="5B6574"/>
                 </a:solidFill>
               </a:rPr>
               <a:t>Year 9 Science  |  9B Plant growth  |  Lesson 1: Reactions in plants</a:t>
             </a:r>
-            <a:endParaRPr lang="en-US" sz="900" dirty="0"/>
+            <a:endParaRPr lang="en-US" sz="1000" dirty="0"/>
           </a:p>
         </p:txBody>
       </p:sp>
@@ -2441,7 +2441,7 @@
           <a:lstStyle>
             <a:lvl1pPr indent="0" marL="0">
               <a:buNone/>
-              <a:defRPr lang="en-US" sz="3000" b="1" dirty="0">
+              <a:defRPr lang="en-US" sz="3400" b="1" dirty="0">
                 <a:solidFill>
                   <a:srgbClr val="3A2E00"/>
                 </a:solidFill>
@@ -2452,7 +2452,7 @@
             <a:pPr indent="0" marL="0">
               <a:buNone/>
             </a:pPr>
-            <a:endParaRPr lang="en-US" sz="3000" dirty="0"/>
+            <a:endParaRPr lang="en-US" sz="3400" dirty="0"/>
           </a:p>
         </p:txBody>
       </p:sp>
@@ -2869,14 +2869,14 @@
               <a:buNone/>
             </a:pPr>
             <a:r>
-              <a:rPr lang="en-US" sz="1300" b="1" spc="200" kern="0" dirty="0">
+              <a:rPr lang="en-US" sz="1400" b="1" spc="200" kern="0" dirty="0">
                 <a:solidFill>
                   <a:srgbClr val="F2CE3E"/>
                 </a:solidFill>
               </a:rPr>
               <a:t>YEAR 9 SCIENCE  ·  9B PLANT GROWTH  ·  LESSON 1 OF 7</a:t>
             </a:r>
-            <a:endParaRPr lang="en-US" sz="1300" dirty="0"/>
+            <a:endParaRPr lang="en-US" sz="1400" dirty="0"/>
           </a:p>
         </p:txBody>
       </p:sp>
@@ -2929,7 +2929,7 @@
         <p:spPr>
           <a:xfrm>
             <a:off x="548640" y="3657600"/>
-            <a:ext cx="10515600" cy="914400"/>
+            <a:ext cx="10515600" cy="1097280"/>
           </a:xfrm>
           <a:prstGeom prst="rect">
             <a:avLst/>
@@ -2945,14 +2945,14 @@
               <a:buNone/>
             </a:pPr>
             <a:r>
-              <a:rPr lang="en-US" sz="2000" dirty="0">
+              <a:rPr lang="en-US" sz="2400" dirty="0">
                 <a:solidFill>
                   <a:srgbClr val="FFFFFF"/>
                 </a:solidFill>
               </a:rPr>
               <a:t>How does a wheat plant turn air, water and light into a harvest?</a:t>
             </a:r>
-            <a:endParaRPr lang="en-US" sz="2000" dirty="0"/>
+            <a:endParaRPr lang="en-US" sz="2400" dirty="0"/>
           </a:p>
         </p:txBody>
       </p:sp>
@@ -2981,14 +2981,14 @@
               <a:buNone/>
             </a:pPr>
             <a:r>
-              <a:rPr lang="en-US" sz="1200" dirty="0">
+              <a:rPr lang="en-US" sz="1400" dirty="0">
                 <a:solidFill>
                   <a:srgbClr val="C9D3E6"/>
                 </a:solidFill>
               </a:rPr>
               <a:t>Exploring Science International 9  ·  Student Book pages 21 to 23  ·  Workbook pages 15 to 16</a:t>
             </a:r>
-            <a:endParaRPr lang="en-US" sz="1200" dirty="0"/>
+            <a:endParaRPr lang="en-US" sz="1400" dirty="0"/>
           </a:p>
         </p:txBody>
       </p:sp>
@@ -3167,14 +3167,14 @@
               <a:buNone/>
             </a:pPr>
             <a:r>
-              <a:rPr lang="en-US" sz="1400" i="1" dirty="0">
+              <a:rPr lang="en-US" sz="1600" i="1" dirty="0">
                 <a:solidFill>
                   <a:srgbClr val="5B6574"/>
                 </a:solidFill>
               </a:rPr>
               <a:t>Mini whiteboards. One answer each, then we check.</a:t>
             </a:r>
-            <a:endParaRPr lang="en-US" sz="1400" dirty="0"/>
+            <a:endParaRPr lang="en-US" sz="1600" dirty="0"/>
           </a:p>
         </p:txBody>
       </p:sp>
@@ -3223,16 +3223,14 @@
           <a:ln/>
         </p:spPr>
         <p:txBody>
-          <a:bodyPr wrap="square" lIns="0" tIns="0" rIns="0" bIns="0" rtlCol="0" anchor="ctr">
-            <a:normAutofit/>
-          </a:bodyPr>
+          <a:bodyPr wrap="square" lIns="0" tIns="0" rIns="0" bIns="0" rtlCol="0" anchor="ctr"/>
           <a:lstStyle/>
           <a:p>
             <a:pPr indent="0" marL="0">
               <a:buNone/>
             </a:pPr>
             <a:r>
-              <a:rPr lang="en-US" sz="1600" b="1" dirty="0">
+              <a:rPr lang="en-US" sz="2000" b="1" dirty="0">
                 <a:solidFill>
                   <a:srgbClr val="7B3A8E"/>
                 </a:solidFill>
@@ -3243,14 +3241,14 @@
               <a:buNone/>
             </a:pPr>
             <a:r>
-              <a:rPr lang="en-US" sz="1600" dirty="0">
+              <a:rPr lang="en-US" sz="2000" dirty="0">
                 <a:solidFill>
                   <a:srgbClr val="141B26"/>
                 </a:solidFill>
               </a:rPr>
               <a:t>Name the two reactants of photosynthesis.</a:t>
             </a:r>
-            <a:endParaRPr lang="en-US" sz="1600" dirty="0"/>
+            <a:endParaRPr lang="en-US" sz="2000" dirty="0"/>
           </a:p>
         </p:txBody>
       </p:sp>
@@ -3299,16 +3297,14 @@
           <a:ln/>
         </p:spPr>
         <p:txBody>
-          <a:bodyPr wrap="square" lIns="0" tIns="0" rIns="0" bIns="0" rtlCol="0" anchor="ctr">
-            <a:normAutofit/>
-          </a:bodyPr>
+          <a:bodyPr wrap="square" lIns="0" tIns="0" rIns="0" bIns="0" rtlCol="0" anchor="ctr"/>
           <a:lstStyle/>
           <a:p>
             <a:pPr indent="0" marL="0">
               <a:buNone/>
             </a:pPr>
             <a:r>
-              <a:rPr lang="en-US" sz="1600" b="1" dirty="0">
+              <a:rPr lang="en-US" sz="2000" b="1" dirty="0">
                 <a:solidFill>
                   <a:srgbClr val="7B3A8E"/>
                 </a:solidFill>
@@ -3319,14 +3315,14 @@
               <a:buNone/>
             </a:pPr>
             <a:r>
-              <a:rPr lang="en-US" sz="1600" dirty="0">
+              <a:rPr lang="en-US" sz="2000" dirty="0">
                 <a:solidFill>
                   <a:srgbClr val="141B26"/>
                 </a:solidFill>
               </a:rPr>
               <a:t>Where in a plant cell does photosynthesis happen?</a:t>
             </a:r>
-            <a:endParaRPr lang="en-US" sz="1600" dirty="0"/>
+            <a:endParaRPr lang="en-US" sz="2000" dirty="0"/>
           </a:p>
         </p:txBody>
       </p:sp>
@@ -3375,16 +3371,14 @@
           <a:ln/>
         </p:spPr>
         <p:txBody>
-          <a:bodyPr wrap="square" lIns="0" tIns="0" rIns="0" bIns="0" rtlCol="0" anchor="ctr">
-            <a:normAutofit/>
-          </a:bodyPr>
+          <a:bodyPr wrap="square" lIns="0" tIns="0" rIns="0" bIns="0" rtlCol="0" anchor="ctr"/>
           <a:lstStyle/>
           <a:p>
             <a:pPr indent="0" marL="0">
               <a:buNone/>
             </a:pPr>
             <a:r>
-              <a:rPr lang="en-US" sz="1600" b="1" dirty="0">
+              <a:rPr lang="en-US" sz="2000" b="1" dirty="0">
                 <a:solidFill>
                   <a:srgbClr val="7B3A8E"/>
                 </a:solidFill>
@@ -3395,14 +3389,14 @@
               <a:buNone/>
             </a:pPr>
             <a:r>
-              <a:rPr lang="en-US" sz="1600" dirty="0">
+              <a:rPr lang="en-US" sz="2000" dirty="0">
                 <a:solidFill>
                   <a:srgbClr val="141B26"/>
                 </a:solidFill>
               </a:rPr>
               <a:t>Does respiration happen in the light, in the dark, or both?</a:t>
             </a:r>
-            <a:endParaRPr lang="en-US" sz="1600" dirty="0"/>
+            <a:endParaRPr lang="en-US" sz="2000" dirty="0"/>
           </a:p>
         </p:txBody>
       </p:sp>
@@ -3451,16 +3445,14 @@
           <a:ln/>
         </p:spPr>
         <p:txBody>
-          <a:bodyPr wrap="square" lIns="0" tIns="0" rIns="0" bIns="0" rtlCol="0" anchor="ctr">
-            <a:normAutofit/>
-          </a:bodyPr>
+          <a:bodyPr wrap="square" lIns="0" tIns="0" rIns="0" bIns="0" rtlCol="0" anchor="ctr"/>
           <a:lstStyle/>
           <a:p>
             <a:pPr indent="0" marL="0">
               <a:buNone/>
             </a:pPr>
             <a:r>
-              <a:rPr lang="en-US" sz="1600" b="1" dirty="0">
+              <a:rPr lang="en-US" sz="2000" b="1" dirty="0">
                 <a:solidFill>
                   <a:srgbClr val="7B3A8E"/>
                 </a:solidFill>
@@ -3471,14 +3463,14 @@
               <a:buNone/>
             </a:pPr>
             <a:r>
-              <a:rPr lang="en-US" sz="1600" dirty="0">
+              <a:rPr lang="en-US" sz="2000" dirty="0">
                 <a:solidFill>
                   <a:srgbClr val="141B26"/>
                 </a:solidFill>
               </a:rPr>
               <a:t>A plant in a dim room grows slowly. Name the limiting factor.</a:t>
             </a:r>
-            <a:endParaRPr lang="en-US" sz="1600" dirty="0"/>
+            <a:endParaRPr lang="en-US" sz="2000" dirty="0"/>
           </a:p>
         </p:txBody>
       </p:sp>
@@ -3527,16 +3519,14 @@
           <a:ln/>
         </p:spPr>
         <p:txBody>
-          <a:bodyPr wrap="square" lIns="0" tIns="0" rIns="0" bIns="0" rtlCol="0" anchor="ctr">
-            <a:normAutofit/>
-          </a:bodyPr>
+          <a:bodyPr wrap="square" lIns="0" tIns="0" rIns="0" bIns="0" rtlCol="0" anchor="ctr"/>
           <a:lstStyle/>
           <a:p>
             <a:pPr indent="0" marL="0">
               <a:buNone/>
             </a:pPr>
             <a:r>
-              <a:rPr lang="en-US" sz="1600" b="1" dirty="0">
+              <a:rPr lang="en-US" sz="2000" b="1" dirty="0">
                 <a:solidFill>
                   <a:srgbClr val="7B3A8E"/>
                 </a:solidFill>
@@ -3547,14 +3537,14 @@
               <a:buNone/>
             </a:pPr>
             <a:r>
-              <a:rPr lang="en-US" sz="1600" dirty="0">
+              <a:rPr lang="en-US" sz="2000" dirty="0">
                 <a:solidFill>
                   <a:srgbClr val="141B26"/>
                 </a:solidFill>
               </a:rPr>
               <a:t>Which tissue carries sugar solution around a plant?</a:t>
             </a:r>
-            <a:endParaRPr lang="en-US" sz="1600" dirty="0"/>
+            <a:endParaRPr lang="en-US" sz="2000" dirty="0"/>
           </a:p>
         </p:txBody>
       </p:sp>
@@ -3883,23 +3873,21 @@
           <a:ln/>
         </p:spPr>
         <p:txBody>
-          <a:bodyPr wrap="square" lIns="0" tIns="0" rIns="0" bIns="0" rtlCol="0" anchor="t">
-            <a:normAutofit/>
-          </a:bodyPr>
+          <a:bodyPr wrap="square" lIns="0" tIns="0" rIns="0" bIns="0" rtlCol="0" anchor="t"/>
           <a:lstStyle/>
           <a:p>
             <a:pPr indent="0" marL="0">
               <a:buNone/>
             </a:pPr>
             <a:r>
-              <a:rPr lang="en-US" sz="1700" dirty="0">
+              <a:rPr lang="en-US" sz="2000" dirty="0">
                 <a:solidFill>
                   <a:srgbClr val="141B26"/>
                 </a:solidFill>
               </a:rPr>
               <a:t>Core: complete both word equations, sort the statements, match the key words, then do the van Helmont calculations.</a:t>
             </a:r>
-            <a:endParaRPr lang="en-US" sz="1700" dirty="0"/>
+            <a:endParaRPr lang="en-US" sz="2000" dirty="0"/>
           </a:p>
         </p:txBody>
       </p:sp>
@@ -3982,23 +3970,21 @@
           <a:ln/>
         </p:spPr>
         <p:txBody>
-          <a:bodyPr wrap="square" lIns="0" tIns="0" rIns="0" bIns="0" rtlCol="0" anchor="t">
-            <a:normAutofit/>
-          </a:bodyPr>
+          <a:bodyPr wrap="square" lIns="0" tIns="0" rIns="0" bIns="0" rtlCol="0" anchor="t"/>
           <a:lstStyle/>
           <a:p>
             <a:pPr indent="0" marL="0">
               <a:buNone/>
             </a:pPr>
             <a:r>
-              <a:rPr lang="en-US" sz="1700" dirty="0">
+              <a:rPr lang="en-US" sz="2000" dirty="0">
                 <a:solidFill>
                   <a:srgbClr val="141B26"/>
                 </a:solidFill>
               </a:rPr>
               <a:t>Stretch: read the pondweed graph, explain the limiting factors and the flooded roots.</a:t>
             </a:r>
-            <a:endParaRPr lang="en-US" sz="1700" dirty="0"/>
+            <a:endParaRPr lang="en-US" sz="2000" dirty="0"/>
           </a:p>
         </p:txBody>
       </p:sp>
@@ -4081,23 +4067,21 @@
           <a:ln/>
         </p:spPr>
         <p:txBody>
-          <a:bodyPr wrap="square" lIns="0" tIns="0" rIns="0" bIns="0" rtlCol="0" anchor="t">
-            <a:normAutofit/>
-          </a:bodyPr>
+          <a:bodyPr wrap="square" lIns="0" tIns="0" rIns="0" bIns="0" rtlCol="0" anchor="t"/>
           <a:lstStyle/>
           <a:p>
             <a:pPr indent="0" marL="0">
               <a:buNone/>
             </a:pPr>
             <a:r>
-              <a:rPr lang="en-US" sz="1700" dirty="0">
+              <a:rPr lang="en-US" sz="2000" dirty="0">
                 <a:solidFill>
                   <a:srgbClr val="141B26"/>
                 </a:solidFill>
               </a:rPr>
               <a:t>Challenge: the energy flow chart and the water claim.</a:t>
             </a:r>
-            <a:endParaRPr lang="en-US" sz="1700" dirty="0"/>
+            <a:endParaRPr lang="en-US" sz="2000" dirty="0"/>
           </a:p>
         </p:txBody>
       </p:sp>
@@ -4180,23 +4164,21 @@
           <a:ln/>
         </p:spPr>
         <p:txBody>
-          <a:bodyPr wrap="square" lIns="0" tIns="0" rIns="0" bIns="0" rtlCol="0" anchor="t">
-            <a:normAutofit/>
-          </a:bodyPr>
+          <a:bodyPr wrap="square" lIns="0" tIns="0" rIns="0" bIns="0" rtlCol="0" anchor="t"/>
           <a:lstStyle/>
           <a:p>
             <a:pPr indent="0" marL="0">
               <a:buNone/>
             </a:pPr>
             <a:r>
-              <a:rPr lang="en-US" sz="1700" dirty="0">
+              <a:rPr lang="en-US" sz="2000" dirty="0">
                 <a:solidFill>
                   <a:srgbClr val="141B26"/>
                 </a:solidFill>
               </a:rPr>
               <a:t>Finished? Write a question for the class in the My thinking box.</a:t>
             </a:r>
-            <a:endParaRPr lang="en-US" sz="1700" dirty="0"/>
+            <a:endParaRPr lang="en-US" sz="2000" dirty="0"/>
           </a:p>
         </p:txBody>
       </p:sp>
@@ -4225,14 +4207,14 @@
               <a:buNone/>
             </a:pPr>
             <a:r>
-              <a:rPr lang="en-US" sz="1300" i="1" dirty="0">
+              <a:rPr lang="en-US" sz="1500" i="1" dirty="0">
                 <a:solidFill>
                   <a:srgbClr val="5B6574"/>
                 </a:solidFill>
               </a:rPr>
               <a:t>Use the key words box. Check your equations with a partner before Stretch.</a:t>
             </a:r>
-            <a:endParaRPr lang="en-US" sz="1300" dirty="0"/>
+            <a:endParaRPr lang="en-US" sz="1500" dirty="0"/>
           </a:p>
         </p:txBody>
       </p:sp>
@@ -4425,23 +4407,21 @@
           <a:ln/>
         </p:spPr>
         <p:txBody>
-          <a:bodyPr wrap="square" lIns="0" tIns="0" rIns="0" bIns="0" rtlCol="0" anchor="t">
-            <a:normAutofit/>
-          </a:bodyPr>
+          <a:bodyPr wrap="square" lIns="0" tIns="0" rIns="0" bIns="0" rtlCol="0" anchor="t"/>
           <a:lstStyle/>
           <a:p>
             <a:pPr indent="0" marL="0">
               <a:buNone/>
             </a:pPr>
             <a:r>
-              <a:rPr lang="en-US" sz="2200" b="1" dirty="0">
+              <a:rPr lang="en-US" sz="2600" b="1" dirty="0">
                 <a:solidFill>
                   <a:srgbClr val="0F2A5F"/>
                 </a:solidFill>
               </a:rPr>
               <a:t>A farmer's wheat field floods for two weeks in spring. Explain why the wheat plants may die. Use the words roots, oxygen and respiration.</a:t>
             </a:r>
-            <a:endParaRPr lang="en-US" sz="2200" dirty="0"/>
+            <a:endParaRPr lang="en-US" sz="2600" dirty="0"/>
           </a:p>
         </p:txBody>
       </p:sp>
@@ -4490,9 +4470,7 @@
           <a:ln/>
         </p:spPr>
         <p:txBody>
-          <a:bodyPr wrap="square" lIns="0" tIns="0" rIns="0" bIns="0" rtlCol="0" anchor="t">
-            <a:normAutofit/>
-          </a:bodyPr>
+          <a:bodyPr wrap="square" lIns="0" tIns="0" rIns="0" bIns="0" rtlCol="0" anchor="t"/>
           <a:lstStyle/>
           <a:p>
             <a:pPr indent="0" marL="0">
@@ -4502,14 +4480,14 @@
               <a:buNone/>
             </a:pPr>
             <a:r>
-              <a:rPr lang="en-US" sz="1500" b="1" dirty="0">
+              <a:rPr lang="en-US" sz="1800" b="1" dirty="0">
                 <a:solidFill>
                   <a:srgbClr val="7B3A8E"/>
                 </a:solidFill>
               </a:rPr>
               <a:t>Sentence frames</a:t>
             </a:r>
-            <a:endParaRPr lang="en-US" sz="1500" dirty="0"/>
+            <a:endParaRPr lang="en-US" sz="1800" dirty="0"/>
           </a:p>
           <a:p>
             <a:pPr indent="0" marL="0">
@@ -4519,14 +4497,14 @@
               <a:buNone/>
             </a:pPr>
             <a:r>
-              <a:rPr lang="en-US" sz="1500" dirty="0">
+              <a:rPr lang="en-US" sz="1800" dirty="0">
                 <a:solidFill>
                   <a:srgbClr val="141B26"/>
                 </a:solidFill>
               </a:rPr>
               <a:t>Roots need ___ for ___.</a:t>
             </a:r>
-            <a:endParaRPr lang="en-US" sz="1500" dirty="0"/>
+            <a:endParaRPr lang="en-US" sz="1800" dirty="0"/>
           </a:p>
           <a:p>
             <a:pPr indent="0" marL="0">
@@ -4536,14 +4514,14 @@
               <a:buNone/>
             </a:pPr>
             <a:r>
-              <a:rPr lang="en-US" sz="1500" dirty="0">
+              <a:rPr lang="en-US" sz="1800" dirty="0">
                 <a:solidFill>
                   <a:srgbClr val="141B26"/>
                 </a:solidFill>
               </a:rPr>
               <a:t>When the soil is flooded, ___ because ___.</a:t>
             </a:r>
-            <a:endParaRPr lang="en-US" sz="1500" dirty="0"/>
+            <a:endParaRPr lang="en-US" sz="1800" dirty="0"/>
           </a:p>
           <a:p>
             <a:pPr indent="0" marL="0">
@@ -4553,14 +4531,14 @@
               <a:buNone/>
             </a:pPr>
             <a:r>
-              <a:rPr lang="en-US" sz="1500" dirty="0">
+              <a:rPr lang="en-US" sz="1800" dirty="0">
                 <a:solidFill>
                   <a:srgbClr val="141B26"/>
                 </a:solidFill>
               </a:rPr>
               <a:t>Without energy from respiration, the root cells ___.</a:t>
             </a:r>
-            <a:endParaRPr lang="en-US" sz="1500" dirty="0"/>
+            <a:endParaRPr lang="en-US" sz="1800" dirty="0"/>
           </a:p>
         </p:txBody>
       </p:sp>
@@ -4760,14 +4738,14 @@
               <a:buNone/>
             </a:pPr>
             <a:r>
-              <a:rPr lang="en-US" sz="1400" i="1" dirty="0">
+              <a:rPr lang="en-US" sz="1600" i="1" dirty="0">
                 <a:solidFill>
                   <a:srgbClr val="5B6574"/>
                 </a:solidFill>
               </a:rPr>
               <a:t>On your worksheet exit ticket. Work alone. Hand it in as you leave.</a:t>
             </a:r>
-            <a:endParaRPr lang="en-US" sz="1400" dirty="0"/>
+            <a:endParaRPr lang="en-US" sz="1600" dirty="0"/>
           </a:p>
         </p:txBody>
       </p:sp>
@@ -4780,25 +4758,23 @@
         <p:spPr>
           <a:xfrm>
             <a:off x="548640" y="1828800"/>
-            <a:ext cx="10881360" cy="1188720"/>
-          </a:xfrm>
-          <a:prstGeom prst="rect">
-            <a:avLst/>
-          </a:prstGeom>
-          <a:noFill/>
-          <a:ln/>
-        </p:spPr>
-        <p:txBody>
-          <a:bodyPr wrap="square" lIns="0" tIns="0" rIns="0" bIns="0" rtlCol="0" anchor="t">
-            <a:normAutofit/>
-          </a:bodyPr>
+            <a:ext cx="9692640" cy="1188720"/>
+          </a:xfrm>
+          <a:prstGeom prst="rect">
+            <a:avLst/>
+          </a:prstGeom>
+          <a:noFill/>
+          <a:ln/>
+        </p:spPr>
+        <p:txBody>
+          <a:bodyPr wrap="square" lIns="0" tIns="0" rIns="0" bIns="0" rtlCol="0" anchor="t"/>
           <a:lstStyle/>
           <a:p>
             <a:pPr indent="0" marL="0">
               <a:buNone/>
             </a:pPr>
             <a:r>
-              <a:rPr lang="en-US" sz="1800" b="1" dirty="0">
+              <a:rPr lang="en-US" sz="2200" b="1" dirty="0">
                 <a:solidFill>
                   <a:srgbClr val="7B3A8E"/>
                 </a:solidFill>
@@ -4809,14 +4785,14 @@
               <a:buNone/>
             </a:pPr>
             <a:r>
-              <a:rPr lang="en-US" sz="1800" dirty="0">
+              <a:rPr lang="en-US" sz="2200" dirty="0">
                 <a:solidFill>
                   <a:srgbClr val="141B26"/>
                 </a:solidFill>
               </a:rPr>
               <a:t>Write the word equation for photosynthesis.</a:t>
             </a:r>
-            <a:endParaRPr lang="en-US" sz="1800" dirty="0"/>
+            <a:endParaRPr lang="en-US" sz="2200" dirty="0"/>
           </a:p>
         </p:txBody>
       </p:sp>
@@ -4829,25 +4805,23 @@
         <p:spPr>
           <a:xfrm>
             <a:off x="548640" y="3017520"/>
-            <a:ext cx="10881360" cy="1188720"/>
-          </a:xfrm>
-          <a:prstGeom prst="rect">
-            <a:avLst/>
-          </a:prstGeom>
-          <a:noFill/>
-          <a:ln/>
-        </p:spPr>
-        <p:txBody>
-          <a:bodyPr wrap="square" lIns="0" tIns="0" rIns="0" bIns="0" rtlCol="0" anchor="t">
-            <a:normAutofit/>
-          </a:bodyPr>
+            <a:ext cx="9692640" cy="1188720"/>
+          </a:xfrm>
+          <a:prstGeom prst="rect">
+            <a:avLst/>
+          </a:prstGeom>
+          <a:noFill/>
+          <a:ln/>
+        </p:spPr>
+        <p:txBody>
+          <a:bodyPr wrap="square" lIns="0" tIns="0" rIns="0" bIns="0" rtlCol="0" anchor="t"/>
           <a:lstStyle/>
           <a:p>
             <a:pPr indent="0" marL="0">
               <a:buNone/>
             </a:pPr>
             <a:r>
-              <a:rPr lang="en-US" sz="1800" b="1" dirty="0">
+              <a:rPr lang="en-US" sz="2200" b="1" dirty="0">
                 <a:solidFill>
                   <a:srgbClr val="7B3A8E"/>
                 </a:solidFill>
@@ -4858,14 +4832,14 @@
               <a:buNone/>
             </a:pPr>
             <a:r>
-              <a:rPr lang="en-US" sz="1800" dirty="0">
+              <a:rPr lang="en-US" sz="2200" dirty="0">
                 <a:solidFill>
                   <a:srgbClr val="141B26"/>
                 </a:solidFill>
               </a:rPr>
               <a:t>Where in a plant cell does photosynthesis happen?</a:t>
             </a:r>
-            <a:endParaRPr lang="en-US" sz="1800" dirty="0"/>
+            <a:endParaRPr lang="en-US" sz="2200" dirty="0"/>
           </a:p>
         </p:txBody>
       </p:sp>
@@ -4878,25 +4852,23 @@
         <p:spPr>
           <a:xfrm>
             <a:off x="548640" y="4206240"/>
-            <a:ext cx="10881360" cy="1188720"/>
-          </a:xfrm>
-          <a:prstGeom prst="rect">
-            <a:avLst/>
-          </a:prstGeom>
-          <a:noFill/>
-          <a:ln/>
-        </p:spPr>
-        <p:txBody>
-          <a:bodyPr wrap="square" lIns="0" tIns="0" rIns="0" bIns="0" rtlCol="0" anchor="t">
-            <a:normAutofit/>
-          </a:bodyPr>
+            <a:ext cx="9692640" cy="1188720"/>
+          </a:xfrm>
+          <a:prstGeom prst="rect">
+            <a:avLst/>
+          </a:prstGeom>
+          <a:noFill/>
+          <a:ln/>
+        </p:spPr>
+        <p:txBody>
+          <a:bodyPr wrap="square" lIns="0" tIns="0" rIns="0" bIns="0" rtlCol="0" anchor="t"/>
           <a:lstStyle/>
           <a:p>
             <a:pPr indent="0" marL="0">
               <a:buNone/>
             </a:pPr>
             <a:r>
-              <a:rPr lang="en-US" sz="1800" b="1" dirty="0">
+              <a:rPr lang="en-US" sz="2200" b="1" dirty="0">
                 <a:solidFill>
                   <a:srgbClr val="7B3A8E"/>
                 </a:solidFill>
@@ -4907,14 +4879,14 @@
               <a:buNone/>
             </a:pPr>
             <a:r>
-              <a:rPr lang="en-US" sz="1800" dirty="0">
+              <a:rPr lang="en-US" sz="2200" dirty="0">
                 <a:solidFill>
                   <a:srgbClr val="141B26"/>
                 </a:solidFill>
               </a:rPr>
               <a:t>Why do plants in a field only photosynthesise during the day?</a:t>
             </a:r>
-            <a:endParaRPr lang="en-US" sz="1800" dirty="0"/>
+            <a:endParaRPr lang="en-US" sz="2200" dirty="0"/>
           </a:p>
         </p:txBody>
       </p:sp>
@@ -5173,90 +5145,88 @@
         <p:spPr>
           <a:xfrm>
             <a:off x="548640" y="1371600"/>
-            <a:ext cx="10881360" cy="4480560"/>
-          </a:xfrm>
-          <a:prstGeom prst="rect">
-            <a:avLst/>
-          </a:prstGeom>
-          <a:noFill/>
-          <a:ln/>
-        </p:spPr>
-        <p:txBody>
-          <a:bodyPr wrap="square" lIns="0" tIns="0" rIns="0" bIns="0" rtlCol="0" anchor="t">
-            <a:normAutofit/>
-          </a:bodyPr>
+            <a:ext cx="10881360" cy="4114800"/>
+          </a:xfrm>
+          <a:prstGeom prst="rect">
+            <a:avLst/>
+          </a:prstGeom>
+          <a:noFill/>
+          <a:ln/>
+        </p:spPr>
+        <p:txBody>
+          <a:bodyPr wrap="square" lIns="0" tIns="0" rIns="0" bIns="0" rtlCol="0" anchor="t"/>
           <a:lstStyle/>
           <a:p>
             <a:pPr marL="342900" indent="-342900">
               <a:spcAft>
-                <a:spcPts val="1000"/>
+                <a:spcPts val="1200"/>
               </a:spcAft>
               <a:buSzPct val="100000"/>
               <a:buChar char="✓"/>
             </a:pPr>
             <a:r>
-              <a:rPr lang="en-US" sz="1700" dirty="0">
+              <a:rPr lang="en-US" sz="2000" dirty="0">
                 <a:solidFill>
                   <a:srgbClr val="141B26"/>
                 </a:solidFill>
               </a:rPr>
               <a:t>Photosynthesis: carbon dioxide + water makes glucose + oxygen, using light energy captured by chlorophyll.</a:t>
             </a:r>
-            <a:endParaRPr lang="en-US" sz="1700" dirty="0"/>
+            <a:endParaRPr lang="en-US" sz="2000" dirty="0"/>
           </a:p>
           <a:p>
             <a:pPr marL="342900" indent="-342900">
               <a:spcAft>
-                <a:spcPts val="1000"/>
+                <a:spcPts val="1200"/>
               </a:spcAft>
               <a:buSzPct val="100000"/>
               <a:buChar char="✓"/>
             </a:pPr>
             <a:r>
-              <a:rPr lang="en-US" sz="1700" dirty="0">
+              <a:rPr lang="en-US" sz="2000" dirty="0">
                 <a:solidFill>
                   <a:srgbClr val="141B26"/>
                 </a:solidFill>
               </a:rPr>
               <a:t>Aerobic respiration: glucose + oxygen makes carbon dioxide + water, releasing energy, in every living cell all the time.</a:t>
             </a:r>
-            <a:endParaRPr lang="en-US" sz="1700" dirty="0"/>
+            <a:endParaRPr lang="en-US" sz="2000" dirty="0"/>
           </a:p>
           <a:p>
             <a:pPr marL="342900" indent="-342900">
               <a:spcAft>
-                <a:spcPts val="1000"/>
+                <a:spcPts val="1200"/>
               </a:spcAft>
               <a:buSzPct val="100000"/>
               <a:buChar char="✓"/>
             </a:pPr>
             <a:r>
-              <a:rPr lang="en-US" sz="1700" dirty="0">
+              <a:rPr lang="en-US" sz="2000" dirty="0">
                 <a:solidFill>
                   <a:srgbClr val="141B26"/>
                 </a:solidFill>
               </a:rPr>
               <a:t>A limiting factor (light, carbon dioxide, water, temperature) slows the rate of photosynthesis.</a:t>
             </a:r>
-            <a:endParaRPr lang="en-US" sz="1700" dirty="0"/>
+            <a:endParaRPr lang="en-US" sz="2000" dirty="0"/>
           </a:p>
           <a:p>
             <a:pPr marL="342900" indent="-342900">
               <a:spcAft>
-                <a:spcPts val="1000"/>
+                <a:spcPts val="1200"/>
               </a:spcAft>
               <a:buSzPct val="100000"/>
               <a:buChar char="✓"/>
             </a:pPr>
             <a:r>
-              <a:rPr lang="en-US" sz="1700" dirty="0">
+              <a:rPr lang="en-US" sz="2000" dirty="0">
                 <a:solidFill>
                   <a:srgbClr val="141B26"/>
                 </a:solidFill>
               </a:rPr>
               <a:t>Phloem carries sugar solution to the roots, which also need oxygen from the soil.</a:t>
             </a:r>
-            <a:endParaRPr lang="en-US" sz="1700" dirty="0"/>
+            <a:endParaRPr lang="en-US" sz="2000" dirty="0"/>
           </a:p>
         </p:txBody>
       </p:sp>
@@ -5285,7 +5255,7 @@
               <a:buNone/>
             </a:pPr>
             <a:r>
-              <a:rPr lang="en-US" sz="1300" b="1" dirty="0">
+              <a:rPr lang="en-US" sz="1500" b="1" dirty="0">
                 <a:solidFill>
                   <a:srgbClr val="7B3A8E"/>
                 </a:solidFill>
@@ -5296,14 +5266,14 @@
               <a:buNone/>
             </a:pPr>
             <a:r>
-              <a:rPr lang="en-US" sz="1300" dirty="0">
+              <a:rPr lang="en-US" sz="1500" dirty="0">
                 <a:solidFill>
                   <a:srgbClr val="141B26"/>
                 </a:solidFill>
               </a:rPr>
               <a:t>How roots, stems and leaves are adapted to get water, mineral salts, light and carbon dioxide.</a:t>
             </a:r>
-            <a:endParaRPr lang="en-US" sz="1300" dirty="0"/>
+            <a:endParaRPr lang="en-US" sz="1500" dirty="0"/>
           </a:p>
         </p:txBody>
       </p:sp>
@@ -5571,77 +5541,75 @@
           <a:ln/>
         </p:spPr>
         <p:txBody>
-          <a:bodyPr wrap="square" lIns="0" tIns="0" rIns="0" bIns="0" rtlCol="0" anchor="t">
-            <a:normAutofit/>
-          </a:bodyPr>
+          <a:bodyPr wrap="square" lIns="0" tIns="0" rIns="0" bIns="0" rtlCol="0" anchor="t"/>
           <a:lstStyle/>
           <a:p>
             <a:pPr indent="0" marL="0">
               <a:spcAft>
-                <a:spcPts val="1000"/>
+                <a:spcPts val="1200"/>
               </a:spcAft>
               <a:buNone/>
             </a:pPr>
             <a:r>
-              <a:rPr lang="en-US" sz="2000" dirty="0">
+              <a:rPr lang="en-US" sz="2400" dirty="0">
                 <a:solidFill>
                   <a:srgbClr val="141B26"/>
                 </a:solidFill>
               </a:rPr>
               <a:t>Farmers want as much useful product (yield) from their crops as possible.</a:t>
             </a:r>
-            <a:endParaRPr lang="en-US" sz="2000" dirty="0"/>
+            <a:endParaRPr lang="en-US" sz="2400" dirty="0"/>
           </a:p>
           <a:p>
             <a:pPr indent="0" marL="0">
               <a:spcAft>
-                <a:spcPts val="1000"/>
+                <a:spcPts val="1200"/>
               </a:spcAft>
               <a:buNone/>
             </a:pPr>
             <a:r>
-              <a:rPr lang="en-US" sz="2000" dirty="0">
+              <a:rPr lang="en-US" sz="2400" dirty="0">
                 <a:solidFill>
                   <a:srgbClr val="141B26"/>
                 </a:solidFill>
               </a:rPr>
               <a:t>1. What process do wheat plants use to make their own food?</a:t>
             </a:r>
-            <a:endParaRPr lang="en-US" sz="2000" dirty="0"/>
+            <a:endParaRPr lang="en-US" sz="2400" dirty="0"/>
           </a:p>
           <a:p>
             <a:pPr indent="0" marL="0">
               <a:spcAft>
-                <a:spcPts val="1000"/>
+                <a:spcPts val="1200"/>
               </a:spcAft>
               <a:buNone/>
             </a:pPr>
             <a:r>
-              <a:rPr lang="en-US" sz="2000" dirty="0">
+              <a:rPr lang="en-US" sz="2400" dirty="0">
                 <a:solidFill>
                   <a:srgbClr val="141B26"/>
                 </a:solidFill>
               </a:rPr>
               <a:t>2. Name the gas that plants take in for this process.</a:t>
             </a:r>
-            <a:endParaRPr lang="en-US" sz="2000" dirty="0"/>
+            <a:endParaRPr lang="en-US" sz="2400" dirty="0"/>
           </a:p>
           <a:p>
             <a:pPr indent="0" marL="0">
               <a:spcAft>
-                <a:spcPts val="1000"/>
+                <a:spcPts val="1200"/>
               </a:spcAft>
               <a:buNone/>
             </a:pPr>
             <a:r>
-              <a:rPr lang="en-US" sz="2000" dirty="0">
+              <a:rPr lang="en-US" sz="2400" dirty="0">
                 <a:solidFill>
                   <a:srgbClr val="141B26"/>
                 </a:solidFill>
               </a:rPr>
               <a:t>3. Suggest the effect of a very cloudy year on the wheat harvest.</a:t>
             </a:r>
-            <a:endParaRPr lang="en-US" sz="2000" dirty="0"/>
+            <a:endParaRPr lang="en-US" sz="2400" dirty="0"/>
           </a:p>
         </p:txBody>
       </p:sp>
@@ -5678,7 +5646,7 @@
         <p:spPr>
           <a:xfrm>
             <a:off x="6858000" y="4975212"/>
-            <a:ext cx="4754880" cy="502920"/>
+            <a:ext cx="4754880" cy="548640"/>
           </a:xfrm>
           <a:prstGeom prst="rect">
             <a:avLst/>
@@ -5694,7 +5662,7 @@
               <a:buNone/>
             </a:pPr>
             <a:r>
-              <a:rPr lang="en-US" sz="1100" dirty="0">
+              <a:rPr lang="en-US" sz="1300" dirty="0">
                 <a:solidFill>
                   <a:srgbClr val="141B26"/>
                 </a:solidFill>
@@ -5704,21 +5672,21 @@
             <a:pPr algn="l" indent="0" marL="0">
               <a:buNone/>
             </a:pPr>
-            <a:endParaRPr lang="en-US" sz="1100" dirty="0"/>
+            <a:endParaRPr lang="en-US" sz="1300" dirty="0"/>
           </a:p>
           <a:p>
             <a:pPr algn="l" indent="0" marL="0">
               <a:buNone/>
             </a:pPr>
             <a:r>
-              <a:rPr lang="en-US" sz="800" dirty="0">
+              <a:rPr lang="en-US" sz="900" dirty="0">
                 <a:solidFill>
                   <a:srgbClr val="5B6574"/>
                 </a:solidFill>
               </a:rPr>
               <a:t>Image: Knowles Gallery, CC BY 2.0, via Wikimedia Commons</a:t>
             </a:r>
-            <a:endParaRPr lang="en-US" sz="1100" dirty="0"/>
+            <a:endParaRPr lang="en-US" sz="1300" dirty="0"/>
           </a:p>
         </p:txBody>
       </p:sp>
@@ -5901,8 +5869,8 @@
         </p:nvSpPr>
         <p:spPr>
           <a:xfrm>
-            <a:off x="548640" y="1325880"/>
-            <a:ext cx="5669280" cy="457200"/>
+            <a:off x="548640" y="1280160"/>
+            <a:ext cx="5486400" cy="411480"/>
           </a:xfrm>
           <a:prstGeom prst="rect">
             <a:avLst/>
@@ -5918,14 +5886,14 @@
               <a:buNone/>
             </a:pPr>
             <a:r>
-              <a:rPr lang="en-US" sz="2000" b="1" dirty="0">
+              <a:rPr lang="en-US" sz="2200" b="1" dirty="0">
                 <a:solidFill>
                   <a:srgbClr val="7B3A8E"/>
                 </a:solidFill>
               </a:rPr>
               <a:t>Today I can ...</a:t>
             </a:r>
-            <a:endParaRPr lang="en-US" sz="2000" dirty="0"/>
+            <a:endParaRPr lang="en-US" sz="2200" dirty="0"/>
           </a:p>
         </p:txBody>
       </p:sp>
@@ -5937,8 +5905,8 @@
         </p:nvSpPr>
         <p:spPr>
           <a:xfrm>
-            <a:off x="594360" y="1947672"/>
-            <a:ext cx="292608" cy="292608"/>
+            <a:off x="594360" y="1810512"/>
+            <a:ext cx="310896" cy="310896"/>
           </a:xfrm>
           <a:prstGeom prst="rect">
             <a:avLst/>
@@ -5962,33 +5930,31 @@
         </p:nvSpPr>
         <p:spPr>
           <a:xfrm>
-            <a:off x="1051560" y="1874520"/>
-            <a:ext cx="5120640" cy="868680"/>
-          </a:xfrm>
-          <a:prstGeom prst="rect">
-            <a:avLst/>
-          </a:prstGeom>
-          <a:noFill/>
-          <a:ln/>
-        </p:spPr>
-        <p:txBody>
-          <a:bodyPr wrap="square" lIns="0" tIns="0" rIns="0" bIns="0" rtlCol="0" anchor="t">
-            <a:normAutofit/>
-          </a:bodyPr>
+            <a:off x="1097280" y="1737360"/>
+            <a:ext cx="10332720" cy="868680"/>
+          </a:xfrm>
+          <a:prstGeom prst="rect">
+            <a:avLst/>
+          </a:prstGeom>
+          <a:noFill/>
+          <a:ln/>
+        </p:spPr>
+        <p:txBody>
+          <a:bodyPr wrap="square" lIns="0" tIns="0" rIns="0" bIns="0" rtlCol="0" anchor="t"/>
           <a:lstStyle/>
           <a:p>
             <a:pPr indent="0" marL="0">
               <a:buNone/>
             </a:pPr>
             <a:r>
-              <a:rPr lang="en-US" sz="1600" dirty="0">
+              <a:rPr lang="en-US" sz="2000" dirty="0">
                 <a:solidFill>
                   <a:srgbClr val="141B26"/>
                 </a:solidFill>
               </a:rPr>
               <a:t>I can write the word and symbol equations for photosynthesis and aerobic respiration, and say where and when each happens in a plant.</a:t>
             </a:r>
-            <a:endParaRPr lang="en-US" sz="1600" dirty="0"/>
+            <a:endParaRPr lang="en-US" sz="2000" dirty="0"/>
           </a:p>
         </p:txBody>
       </p:sp>
@@ -6000,8 +5966,8 @@
         </p:nvSpPr>
         <p:spPr>
           <a:xfrm>
-            <a:off x="594360" y="2907792"/>
-            <a:ext cx="292608" cy="292608"/>
+            <a:off x="594360" y="2679192"/>
+            <a:ext cx="310896" cy="310896"/>
           </a:xfrm>
           <a:prstGeom prst="rect">
             <a:avLst/>
@@ -6025,33 +5991,31 @@
         </p:nvSpPr>
         <p:spPr>
           <a:xfrm>
-            <a:off x="1051560" y="2834640"/>
-            <a:ext cx="5120640" cy="868680"/>
-          </a:xfrm>
-          <a:prstGeom prst="rect">
-            <a:avLst/>
-          </a:prstGeom>
-          <a:noFill/>
-          <a:ln/>
-        </p:spPr>
-        <p:txBody>
-          <a:bodyPr wrap="square" lIns="0" tIns="0" rIns="0" bIns="0" rtlCol="0" anchor="t">
-            <a:normAutofit/>
-          </a:bodyPr>
+            <a:off x="1097280" y="2606040"/>
+            <a:ext cx="10332720" cy="868680"/>
+          </a:xfrm>
+          <a:prstGeom prst="rect">
+            <a:avLst/>
+          </a:prstGeom>
+          <a:noFill/>
+          <a:ln/>
+        </p:spPr>
+        <p:txBody>
+          <a:bodyPr wrap="square" lIns="0" tIns="0" rIns="0" bIns="0" rtlCol="0" anchor="t"/>
           <a:lstStyle/>
           <a:p>
             <a:pPr indent="0" marL="0">
               <a:buNone/>
             </a:pPr>
             <a:r>
-              <a:rPr lang="en-US" sz="1600" dirty="0">
+              <a:rPr lang="en-US" sz="2000" dirty="0">
                 <a:solidFill>
                   <a:srgbClr val="141B26"/>
                 </a:solidFill>
               </a:rPr>
               <a:t>I can explain how limiting factors slow photosynthesis and why roots need oxygen.</a:t>
             </a:r>
-            <a:endParaRPr lang="en-US" sz="1600" dirty="0"/>
+            <a:endParaRPr lang="en-US" sz="2000" dirty="0"/>
           </a:p>
         </p:txBody>
       </p:sp>
@@ -6063,8 +6027,8 @@
         </p:nvSpPr>
         <p:spPr>
           <a:xfrm>
-            <a:off x="6583680" y="1325880"/>
-            <a:ext cx="5029200" cy="457200"/>
+            <a:off x="548640" y="3611880"/>
+            <a:ext cx="5486400" cy="411480"/>
           </a:xfrm>
           <a:prstGeom prst="rect">
             <a:avLst/>
@@ -6080,14 +6044,14 @@
               <a:buNone/>
             </a:pPr>
             <a:r>
-              <a:rPr lang="en-US" sz="2000" b="1" dirty="0">
+              <a:rPr lang="en-US" sz="2200" b="1" dirty="0">
                 <a:solidFill>
                   <a:srgbClr val="7B3A8E"/>
                 </a:solidFill>
               </a:rPr>
               <a:t>Key words today</a:t>
             </a:r>
-            <a:endParaRPr lang="en-US" sz="2000" dirty="0"/>
+            <a:endParaRPr lang="en-US" sz="2200" dirty="0"/>
           </a:p>
         </p:txBody>
       </p:sp>
@@ -6099,329 +6063,277 @@
         </p:nvSpPr>
         <p:spPr>
           <a:xfrm>
-            <a:off x="6583680" y="1874520"/>
-            <a:ext cx="5029200" cy="4023360"/>
-          </a:xfrm>
-          <a:prstGeom prst="rect">
-            <a:avLst/>
-          </a:prstGeom>
-          <a:noFill/>
-          <a:ln/>
-        </p:spPr>
-        <p:txBody>
-          <a:bodyPr wrap="square" lIns="0" tIns="0" rIns="0" bIns="0" rtlCol="0" anchor="t">
-            <a:normAutofit/>
-          </a:bodyPr>
+            <a:off x="548640" y="4069080"/>
+            <a:ext cx="3515258" cy="1920240"/>
+          </a:xfrm>
+          <a:prstGeom prst="rect">
+            <a:avLst/>
+          </a:prstGeom>
+          <a:noFill/>
+          <a:ln/>
+        </p:spPr>
+        <p:txBody>
+          <a:bodyPr wrap="square" lIns="0" tIns="0" rIns="0" bIns="0" rtlCol="0" anchor="t"/>
+          <a:lstStyle/>
+          <a:p>
+            <a:pPr marL="304800" indent="-304800">
+              <a:spcAft>
+                <a:spcPts val="600"/>
+              </a:spcAft>
+              <a:buSzPct val="100000"/>
+              <a:buChar char="•"/>
+            </a:pPr>
+            <a:r>
+              <a:rPr lang="en-US" sz="2100" b="1" dirty="0">
+                <a:solidFill>
+                  <a:srgbClr val="0F2A5F"/>
+                </a:solidFill>
+              </a:rPr>
+              <a:t>photosynthesis</a:t>
+            </a:r>
+            <a:endParaRPr lang="en-US" sz="2100" dirty="0"/>
+          </a:p>
+          <a:p>
+            <a:pPr marL="304800" indent="-304800">
+              <a:spcAft>
+                <a:spcPts val="600"/>
+              </a:spcAft>
+              <a:buSzPct val="100000"/>
+              <a:buChar char="•"/>
+            </a:pPr>
+            <a:r>
+              <a:rPr lang="en-US" sz="2100" b="1" dirty="0">
+                <a:solidFill>
+                  <a:srgbClr val="0F2A5F"/>
+                </a:solidFill>
+              </a:rPr>
+              <a:t>aerobic respiration</a:t>
+            </a:r>
+            <a:endParaRPr lang="en-US" sz="2100" dirty="0"/>
+          </a:p>
+          <a:p>
+            <a:pPr marL="304800" indent="-304800">
+              <a:spcAft>
+                <a:spcPts val="600"/>
+              </a:spcAft>
+              <a:buSzPct val="100000"/>
+              <a:buChar char="•"/>
+            </a:pPr>
+            <a:r>
+              <a:rPr lang="en-US" sz="2100" b="1" dirty="0">
+                <a:solidFill>
+                  <a:srgbClr val="0F2A5F"/>
+                </a:solidFill>
+              </a:rPr>
+              <a:t>chlorophyll</a:t>
+            </a:r>
+            <a:endParaRPr lang="en-US" sz="2100" dirty="0"/>
+          </a:p>
+          <a:p>
+            <a:pPr marL="304800" indent="-304800">
+              <a:spcAft>
+                <a:spcPts val="600"/>
+              </a:spcAft>
+              <a:buSzPct val="100000"/>
+              <a:buChar char="•"/>
+            </a:pPr>
+            <a:r>
+              <a:rPr lang="en-US" sz="2100" b="1" dirty="0">
+                <a:solidFill>
+                  <a:srgbClr val="0F2A5F"/>
+                </a:solidFill>
+              </a:rPr>
+              <a:t>chloroplast</a:t>
+            </a:r>
+            <a:endParaRPr lang="en-US" sz="2100" dirty="0"/>
+          </a:p>
+        </p:txBody>
+      </p:sp>
+      <p:sp>
+        <p:nvSpPr>
+          <p:cNvPr id="12" name="Text 10"/>
+          <p:cNvSpPr txBox="1"/>
+          <p:nvPr/>
+        </p:nvSpPr>
+        <p:spPr>
+          <a:xfrm>
+            <a:off x="4338218" y="4069080"/>
+            <a:ext cx="3515258" cy="1920240"/>
+          </a:xfrm>
+          <a:prstGeom prst="rect">
+            <a:avLst/>
+          </a:prstGeom>
+          <a:noFill/>
+          <a:ln/>
+        </p:spPr>
+        <p:txBody>
+          <a:bodyPr wrap="square" lIns="0" tIns="0" rIns="0" bIns="0" rtlCol="0" anchor="t"/>
+          <a:lstStyle/>
+          <a:p>
+            <a:pPr marL="304800" indent="-304800">
+              <a:spcAft>
+                <a:spcPts val="600"/>
+              </a:spcAft>
+              <a:buSzPct val="100000"/>
+              <a:buChar char="•"/>
+            </a:pPr>
+            <a:r>
+              <a:rPr lang="en-US" sz="2100" b="1" dirty="0">
+                <a:solidFill>
+                  <a:srgbClr val="0F2A5F"/>
+                </a:solidFill>
+              </a:rPr>
+              <a:t>glucose</a:t>
+            </a:r>
+            <a:endParaRPr lang="en-US" sz="2100" dirty="0"/>
+          </a:p>
+          <a:p>
+            <a:pPr marL="304800" indent="-304800">
+              <a:spcAft>
+                <a:spcPts val="600"/>
+              </a:spcAft>
+              <a:buSzPct val="100000"/>
+              <a:buChar char="•"/>
+            </a:pPr>
+            <a:r>
+              <a:rPr lang="en-US" sz="2100" b="1" dirty="0">
+                <a:solidFill>
+                  <a:srgbClr val="0F2A5F"/>
+                </a:solidFill>
+              </a:rPr>
+              <a:t>reactant</a:t>
+            </a:r>
+            <a:endParaRPr lang="en-US" sz="2100" dirty="0"/>
+          </a:p>
+          <a:p>
+            <a:pPr marL="304800" indent="-304800">
+              <a:spcAft>
+                <a:spcPts val="600"/>
+              </a:spcAft>
+              <a:buSzPct val="100000"/>
+              <a:buChar char="•"/>
+            </a:pPr>
+            <a:r>
+              <a:rPr lang="en-US" sz="2100" b="1" dirty="0">
+                <a:solidFill>
+                  <a:srgbClr val="0F2A5F"/>
+                </a:solidFill>
+              </a:rPr>
+              <a:t>product</a:t>
+            </a:r>
+            <a:endParaRPr lang="en-US" sz="2100" dirty="0"/>
+          </a:p>
+          <a:p>
+            <a:pPr marL="304800" indent="-304800">
+              <a:spcAft>
+                <a:spcPts val="600"/>
+              </a:spcAft>
+              <a:buSzPct val="100000"/>
+              <a:buChar char="•"/>
+            </a:pPr>
+            <a:r>
+              <a:rPr lang="en-US" sz="2100" b="1" dirty="0">
+                <a:solidFill>
+                  <a:srgbClr val="0F2A5F"/>
+                </a:solidFill>
+              </a:rPr>
+              <a:t>limiting factor</a:t>
+            </a:r>
+            <a:endParaRPr lang="en-US" sz="2100" dirty="0"/>
+          </a:p>
+        </p:txBody>
+      </p:sp>
+      <p:sp>
+        <p:nvSpPr>
+          <p:cNvPr id="13" name="Text 11"/>
+          <p:cNvSpPr txBox="1"/>
+          <p:nvPr/>
+        </p:nvSpPr>
+        <p:spPr>
+          <a:xfrm>
+            <a:off x="8127797" y="4069080"/>
+            <a:ext cx="3515258" cy="1920240"/>
+          </a:xfrm>
+          <a:prstGeom prst="rect">
+            <a:avLst/>
+          </a:prstGeom>
+          <a:noFill/>
+          <a:ln/>
+        </p:spPr>
+        <p:txBody>
+          <a:bodyPr wrap="square" lIns="0" tIns="0" rIns="0" bIns="0" rtlCol="0" anchor="t"/>
+          <a:lstStyle/>
+          <a:p>
+            <a:pPr marL="304800" indent="-304800">
+              <a:spcAft>
+                <a:spcPts val="600"/>
+              </a:spcAft>
+              <a:buSzPct val="100000"/>
+              <a:buChar char="•"/>
+            </a:pPr>
+            <a:r>
+              <a:rPr lang="en-US" sz="2200" b="1" dirty="0">
+                <a:solidFill>
+                  <a:srgbClr val="0F2A5F"/>
+                </a:solidFill>
+              </a:rPr>
+              <a:t>phloem</a:t>
+            </a:r>
+            <a:endParaRPr lang="en-US" sz="2200" dirty="0"/>
+          </a:p>
+          <a:p>
+            <a:pPr marL="304800" indent="-304800">
+              <a:spcAft>
+                <a:spcPts val="600"/>
+              </a:spcAft>
+              <a:buSzPct val="100000"/>
+              <a:buChar char="•"/>
+            </a:pPr>
+            <a:r>
+              <a:rPr lang="en-US" sz="2200" b="1" dirty="0">
+                <a:solidFill>
+                  <a:srgbClr val="0F2A5F"/>
+                </a:solidFill>
+              </a:rPr>
+              <a:t>yield</a:t>
+            </a:r>
+            <a:endParaRPr lang="en-US" sz="2200" dirty="0"/>
+          </a:p>
+        </p:txBody>
+      </p:sp>
+      <p:sp>
+        <p:nvSpPr>
+          <p:cNvPr id="14" name="Text 12"/>
+          <p:cNvSpPr txBox="1"/>
+          <p:nvPr/>
+        </p:nvSpPr>
+        <p:spPr>
+          <a:xfrm>
+            <a:off x="548640" y="6035040"/>
+            <a:ext cx="10881360" cy="320040"/>
+          </a:xfrm>
+          <a:prstGeom prst="rect">
+            <a:avLst/>
+          </a:prstGeom>
+          <a:noFill/>
+          <a:ln/>
+        </p:spPr>
+        <p:txBody>
+          <a:bodyPr wrap="square" lIns="0" tIns="0" rIns="0" bIns="0" rtlCol="0" anchor="ctr"/>
           <a:lstStyle/>
           <a:p>
             <a:pPr indent="0" marL="0">
-              <a:spcAft>
-                <a:spcPts val="500"/>
-              </a:spcAft>
-              <a:buNone/>
-            </a:pPr>
-            <a:r>
-              <a:rPr lang="en-US" sz="1300" b="1" dirty="0">
-                <a:solidFill>
-                  <a:srgbClr val="0F2A5F"/>
-                </a:solidFill>
-              </a:rPr>
-              <a:t>photosynthesis</a:t>
-            </a:r>
-            <a:pPr indent="0" marL="0">
-              <a:spcAft>
-                <a:spcPts val="500"/>
-              </a:spcAft>
-              <a:buNone/>
-            </a:pPr>
-            <a:r>
-              <a:rPr lang="en-US" sz="1300" dirty="0">
-                <a:solidFill>
-                  <a:srgbClr val="141B26"/>
-                </a:solidFill>
-              </a:rPr>
-              <a:t>  the process plants use to make glucose from carbon dioxide and water, using light</a:t>
-            </a:r>
-            <a:endParaRPr lang="en-US" sz="1300" dirty="0"/>
-          </a:p>
-          <a:p>
-            <a:pPr indent="0" marL="0">
-              <a:spcAft>
-                <a:spcPts val="500"/>
-              </a:spcAft>
-              <a:buNone/>
-            </a:pPr>
-            <a:r>
-              <a:rPr lang="en-US" sz="1300" b="1" dirty="0">
-                <a:solidFill>
-                  <a:srgbClr val="0F2A5F"/>
-                </a:solidFill>
-              </a:rPr>
-              <a:t>aerobic respiration</a:t>
-            </a:r>
-            <a:pPr indent="0" marL="0">
-              <a:spcAft>
-                <a:spcPts val="500"/>
-              </a:spcAft>
-              <a:buNone/>
-            </a:pPr>
-            <a:r>
-              <a:rPr lang="en-US" sz="1300" dirty="0">
-                <a:solidFill>
-                  <a:srgbClr val="141B26"/>
-                </a:solidFill>
-              </a:rPr>
-              <a:t>  the reaction in every living cell that releases energy from glucose using oxygen</a:t>
-            </a:r>
-            <a:endParaRPr lang="en-US" sz="1300" dirty="0"/>
-          </a:p>
-          <a:p>
-            <a:pPr indent="0" marL="0">
-              <a:spcAft>
-                <a:spcPts val="500"/>
-              </a:spcAft>
-              <a:buNone/>
-            </a:pPr>
-            <a:r>
-              <a:rPr lang="en-US" sz="1300" b="1" dirty="0">
-                <a:solidFill>
-                  <a:srgbClr val="0F2A5F"/>
-                </a:solidFill>
-              </a:rPr>
-              <a:t>chlorophyll</a:t>
-            </a:r>
-            <a:pPr indent="0" marL="0">
-              <a:spcAft>
-                <a:spcPts val="500"/>
-              </a:spcAft>
-              <a:buNone/>
-            </a:pPr>
-            <a:r>
-              <a:rPr lang="en-US" sz="1300" dirty="0">
-                <a:solidFill>
-                  <a:srgbClr val="141B26"/>
-                </a:solidFill>
-              </a:rPr>
-              <a:t>  the green substance that captures energy from light</a:t>
-            </a:r>
-            <a:endParaRPr lang="en-US" sz="1300" dirty="0"/>
-          </a:p>
-          <a:p>
-            <a:pPr indent="0" marL="0">
-              <a:spcAft>
-                <a:spcPts val="500"/>
-              </a:spcAft>
-              <a:buNone/>
-            </a:pPr>
-            <a:r>
-              <a:rPr lang="en-US" sz="1300" b="1" dirty="0">
-                <a:solidFill>
-                  <a:srgbClr val="0F2A5F"/>
-                </a:solidFill>
-              </a:rPr>
-              <a:t>chloroplast</a:t>
-            </a:r>
-            <a:pPr indent="0" marL="0">
-              <a:spcAft>
-                <a:spcPts val="500"/>
-              </a:spcAft>
-              <a:buNone/>
-            </a:pPr>
-            <a:r>
-              <a:rPr lang="en-US" sz="1300" dirty="0">
-                <a:solidFill>
-                  <a:srgbClr val="141B26"/>
-                </a:solidFill>
-              </a:rPr>
-              <a:t>  the part of a plant cell where photosynthesis happens</a:t>
-            </a:r>
-            <a:endParaRPr lang="en-US" sz="1300" dirty="0"/>
-          </a:p>
-          <a:p>
-            <a:pPr indent="0" marL="0">
-              <a:spcAft>
-                <a:spcPts val="500"/>
-              </a:spcAft>
-              <a:buNone/>
-            </a:pPr>
-            <a:r>
-              <a:rPr lang="en-US" sz="1300" b="1" dirty="0">
-                <a:solidFill>
-                  <a:srgbClr val="0F2A5F"/>
-                </a:solidFill>
-              </a:rPr>
-              <a:t>glucose</a:t>
-            </a:r>
-            <a:pPr indent="0" marL="0">
-              <a:spcAft>
-                <a:spcPts val="500"/>
-              </a:spcAft>
-              <a:buNone/>
-            </a:pPr>
-            <a:r>
-              <a:rPr lang="en-US" sz="1300" dirty="0">
-                <a:solidFill>
-                  <a:srgbClr val="141B26"/>
-                </a:solidFill>
-              </a:rPr>
-              <a:t>  the sugar made in photosynthesis</a:t>
-            </a:r>
-            <a:endParaRPr lang="en-US" sz="1300" dirty="0"/>
-          </a:p>
-          <a:p>
-            <a:pPr indent="0" marL="0">
-              <a:spcAft>
-                <a:spcPts val="500"/>
-              </a:spcAft>
-              <a:buNone/>
-            </a:pPr>
-            <a:r>
-              <a:rPr lang="en-US" sz="1300" b="1" dirty="0">
-                <a:solidFill>
-                  <a:srgbClr val="0F2A5F"/>
-                </a:solidFill>
-              </a:rPr>
-              <a:t>reactant</a:t>
-            </a:r>
-            <a:pPr indent="0" marL="0">
-              <a:spcAft>
-                <a:spcPts val="500"/>
-              </a:spcAft>
-              <a:buNone/>
-            </a:pPr>
-            <a:r>
-              <a:rPr lang="en-US" sz="1300" dirty="0">
-                <a:solidFill>
-                  <a:srgbClr val="141B26"/>
-                </a:solidFill>
-              </a:rPr>
-              <a:t>  a substance used up in a chemical reaction</a:t>
-            </a:r>
-            <a:endParaRPr lang="en-US" sz="1300" dirty="0"/>
-          </a:p>
-          <a:p>
-            <a:pPr indent="0" marL="0">
-              <a:spcAft>
-                <a:spcPts val="500"/>
-              </a:spcAft>
-              <a:buNone/>
-            </a:pPr>
-            <a:r>
-              <a:rPr lang="en-US" sz="1300" b="1" dirty="0">
-                <a:solidFill>
-                  <a:srgbClr val="0F2A5F"/>
-                </a:solidFill>
-              </a:rPr>
-              <a:t>product</a:t>
-            </a:r>
-            <a:pPr indent="0" marL="0">
-              <a:spcAft>
-                <a:spcPts val="500"/>
-              </a:spcAft>
-              <a:buNone/>
-            </a:pPr>
-            <a:r>
-              <a:rPr lang="en-US" sz="1300" dirty="0">
-                <a:solidFill>
-                  <a:srgbClr val="141B26"/>
-                </a:solidFill>
-              </a:rPr>
-              <a:t>  a substance made in a chemical reaction</a:t>
-            </a:r>
-            <a:endParaRPr lang="en-US" sz="1300" dirty="0"/>
-          </a:p>
-          <a:p>
-            <a:pPr indent="0" marL="0">
-              <a:spcAft>
-                <a:spcPts val="500"/>
-              </a:spcAft>
-              <a:buNone/>
-            </a:pPr>
-            <a:r>
-              <a:rPr lang="en-US" sz="1300" b="1" dirty="0">
-                <a:solidFill>
-                  <a:srgbClr val="0F2A5F"/>
-                </a:solidFill>
-              </a:rPr>
-              <a:t>limiting factor</a:t>
-            </a:r>
-            <a:pPr indent="0" marL="0">
-              <a:spcAft>
-                <a:spcPts val="500"/>
-              </a:spcAft>
-              <a:buNone/>
-            </a:pPr>
-            <a:r>
-              <a:rPr lang="en-US" sz="1300" dirty="0">
-                <a:solidFill>
-                  <a:srgbClr val="141B26"/>
-                </a:solidFill>
-              </a:rPr>
-              <a:t>  a variable that slows down the rate of photosynthesis</a:t>
-            </a:r>
-            <a:endParaRPr lang="en-US" sz="1300" dirty="0"/>
-          </a:p>
-          <a:p>
-            <a:pPr indent="0" marL="0">
-              <a:spcAft>
-                <a:spcPts val="500"/>
-              </a:spcAft>
-              <a:buNone/>
-            </a:pPr>
-            <a:r>
-              <a:rPr lang="en-US" sz="1300" b="1" dirty="0">
-                <a:solidFill>
-                  <a:srgbClr val="0F2A5F"/>
-                </a:solidFill>
-              </a:rPr>
-              <a:t>phloem</a:t>
-            </a:r>
-            <a:pPr indent="0" marL="0">
-              <a:spcAft>
-                <a:spcPts val="500"/>
-              </a:spcAft>
-              <a:buNone/>
-            </a:pPr>
-            <a:r>
-              <a:rPr lang="en-US" sz="1300" dirty="0">
-                <a:solidFill>
-                  <a:srgbClr val="141B26"/>
-                </a:solidFill>
-              </a:rPr>
-              <a:t>  tubes made of living cells that carry sugar solution around a plant</a:t>
-            </a:r>
-            <a:endParaRPr lang="en-US" sz="1300" dirty="0"/>
-          </a:p>
-          <a:p>
-            <a:pPr indent="0" marL="0">
-              <a:spcAft>
-                <a:spcPts val="500"/>
-              </a:spcAft>
-              <a:buNone/>
-            </a:pPr>
-            <a:r>
-              <a:rPr lang="en-US" sz="1300" b="1" dirty="0">
-                <a:solidFill>
-                  <a:srgbClr val="0F2A5F"/>
-                </a:solidFill>
-              </a:rPr>
-              <a:t>yield</a:t>
-            </a:r>
-            <a:pPr indent="0" marL="0">
-              <a:spcAft>
-                <a:spcPts val="500"/>
-              </a:spcAft>
-              <a:buNone/>
-            </a:pPr>
-            <a:r>
-              <a:rPr lang="en-US" sz="1300" dirty="0">
-                <a:solidFill>
-                  <a:srgbClr val="141B26"/>
-                </a:solidFill>
-              </a:rPr>
-              <a:t>  the amount of useful product a farmer gets from a crop</a:t>
-            </a:r>
-            <a:endParaRPr lang="en-US" sz="1300" dirty="0"/>
+              <a:buNone/>
+            </a:pPr>
+            <a:r>
+              <a:rPr lang="en-US" sz="1400" i="1" dirty="0">
+                <a:solidFill>
+                  <a:srgbClr val="5B6574"/>
+                </a:solidFill>
+              </a:rPr>
+              <a:t>Meanings are in the key words box on your worksheet.</a:t>
+            </a:r>
+            <a:endParaRPr lang="en-US" sz="1400" dirty="0"/>
           </a:p>
         </p:txBody>
       </p:sp>
@@ -6605,32 +6517,30 @@
         <p:spPr>
           <a:xfrm>
             <a:off x="548640" y="1371600"/>
-            <a:ext cx="4297680" cy="2377440"/>
-          </a:xfrm>
-          <a:prstGeom prst="rect">
-            <a:avLst/>
-          </a:prstGeom>
-          <a:noFill/>
-          <a:ln/>
-        </p:spPr>
-        <p:txBody>
-          <a:bodyPr wrap="square" lIns="0" tIns="0" rIns="0" bIns="0" rtlCol="0" anchor="t">
-            <a:normAutofit/>
-          </a:bodyPr>
+            <a:ext cx="4297680" cy="2651760"/>
+          </a:xfrm>
+          <a:prstGeom prst="rect">
+            <a:avLst/>
+          </a:prstGeom>
+          <a:noFill/>
+          <a:ln/>
+        </p:spPr>
+        <p:txBody>
+          <a:bodyPr wrap="square" lIns="0" tIns="0" rIns="0" bIns="0" rtlCol="0" anchor="t"/>
           <a:lstStyle/>
           <a:p>
             <a:pPr indent="0" marL="0">
               <a:buNone/>
             </a:pPr>
             <a:r>
-              <a:rPr lang="en-US" sz="2400" b="1" dirty="0">
+              <a:rPr lang="en-US" sz="2100" b="1" dirty="0">
                 <a:solidFill>
                   <a:srgbClr val="0F2A5F"/>
                 </a:solidFill>
               </a:rPr>
               <a:t>Aristotle thought roots sucked up soil for plants to eat. Van Helmont grew a willow for five years, adding only rainwater. The soil lost 0.06 kg. The tree gained over 74 kg. Where did the extra mass come from?</a:t>
             </a:r>
-            <a:endParaRPr lang="en-US" sz="2400" dirty="0"/>
+            <a:endParaRPr lang="en-US" sz="2100" dirty="0"/>
           </a:p>
         </p:txBody>
       </p:sp>
@@ -6642,19 +6552,17 @@
         </p:nvSpPr>
         <p:spPr>
           <a:xfrm>
-            <a:off x="548640" y="3794760"/>
-            <a:ext cx="4297680" cy="2103120"/>
-          </a:xfrm>
-          <a:prstGeom prst="rect">
-            <a:avLst/>
-          </a:prstGeom>
-          <a:noFill/>
-          <a:ln/>
-        </p:spPr>
-        <p:txBody>
-          <a:bodyPr wrap="square" lIns="0" tIns="0" rIns="0" bIns="0" rtlCol="0" anchor="t">
-            <a:normAutofit/>
-          </a:bodyPr>
+            <a:off x="548640" y="4114800"/>
+            <a:ext cx="4297680" cy="1828800"/>
+          </a:xfrm>
+          <a:prstGeom prst="rect">
+            <a:avLst/>
+          </a:prstGeom>
+          <a:noFill/>
+          <a:ln/>
+        </p:spPr>
+        <p:txBody>
+          <a:bodyPr wrap="square" lIns="0" tIns="0" rIns="0" bIns="0" rtlCol="0" anchor="t"/>
           <a:lstStyle/>
           <a:p>
             <a:pPr indent="0" marL="0">
@@ -6664,14 +6572,14 @@
               <a:buNone/>
             </a:pPr>
             <a:r>
-              <a:rPr lang="en-US" sz="1600" dirty="0">
+              <a:rPr lang="en-US" sz="2000" dirty="0">
                 <a:solidFill>
                   <a:srgbClr val="141B26"/>
                 </a:solidFill>
               </a:rPr>
               <a:t>Vote with a partner: soil, water, air or light?</a:t>
             </a:r>
-            <a:endParaRPr lang="en-US" sz="1600" dirty="0"/>
+            <a:endParaRPr lang="en-US" sz="2000" dirty="0"/>
           </a:p>
         </p:txBody>
       </p:sp>
@@ -6708,7 +6616,7 @@
         <p:spPr>
           <a:xfrm>
             <a:off x="5029200" y="4869180"/>
-            <a:ext cx="6583680" cy="502920"/>
+            <a:ext cx="6583680" cy="548640"/>
           </a:xfrm>
           <a:prstGeom prst="rect">
             <a:avLst/>
@@ -6724,14 +6632,14 @@
               <a:buNone/>
             </a:pPr>
             <a:r>
-              <a:rPr lang="en-US" sz="1100" dirty="0">
+              <a:rPr lang="en-US" sz="1300" dirty="0">
                 <a:solidFill>
                   <a:srgbClr val="141B26"/>
                 </a:solidFill>
               </a:rPr>
               <a:t>Van Helmont's experiment, 1640s</a:t>
             </a:r>
-            <a:endParaRPr lang="en-US" sz="1100" dirty="0"/>
+            <a:endParaRPr lang="en-US" sz="1300" dirty="0"/>
           </a:p>
         </p:txBody>
       </p:sp>
@@ -6914,8 +6822,8 @@
         </p:nvSpPr>
         <p:spPr>
           <a:xfrm>
-            <a:off x="548640" y="6053328"/>
-            <a:ext cx="9601200" cy="292608"/>
+            <a:off x="548640" y="6035040"/>
+            <a:ext cx="9601200" cy="310896"/>
           </a:xfrm>
           <a:prstGeom prst="rect">
             <a:avLst/>
@@ -6931,7 +6839,7 @@
               <a:buNone/>
             </a:pPr>
             <a:r>
-              <a:rPr lang="en-US" sz="1200" b="1" dirty="0">
+              <a:rPr lang="en-US" sz="1400" b="1" dirty="0">
                 <a:solidFill>
                   <a:srgbClr val="7B3A8E"/>
                 </a:solidFill>
@@ -6942,14 +6850,14 @@
               <a:buNone/>
             </a:pPr>
             <a:r>
-              <a:rPr lang="en-US" sz="1200" dirty="0">
+              <a:rPr lang="en-US" sz="1400" dirty="0">
                 <a:solidFill>
                   <a:srgbClr val="7B3A8E"/>
                 </a:solidFill>
               </a:rPr>
               <a:t>photosynthesis   ·   reactant   ·   product   ·   glucose</a:t>
             </a:r>
-            <a:endParaRPr lang="en-US" sz="1200" dirty="0"/>
+            <a:endParaRPr lang="en-US" sz="1400" dirty="0"/>
           </a:p>
         </p:txBody>
       </p:sp>
@@ -6978,14 +6886,14 @@
               <a:buNone/>
             </a:pPr>
             <a:r>
-              <a:rPr lang="en-US" sz="1600" dirty="0">
+              <a:rPr lang="en-US" sz="1500" dirty="0">
                 <a:solidFill>
                   <a:srgbClr val="141B26"/>
                 </a:solidFill>
               </a:rPr>
               <a:t>Plants make their own food: glucose. The reactants are carbon dioxide and water; the products are glucose and oxygen.</a:t>
             </a:r>
-            <a:endParaRPr lang="en-US" sz="1600" dirty="0"/>
+            <a:endParaRPr lang="en-US" sz="1500" dirty="0"/>
           </a:p>
         </p:txBody>
       </p:sp>
@@ -7056,16 +6964,14 @@
           <a:ln/>
         </p:spPr>
         <p:txBody>
-          <a:bodyPr wrap="square" lIns="0" tIns="0" rIns="0" bIns="0" rtlCol="0" anchor="ctr">
-            <a:normAutofit/>
-          </a:bodyPr>
+          <a:bodyPr wrap="square" lIns="0" tIns="0" rIns="0" bIns="0" rtlCol="0" anchor="ctr"/>
           <a:lstStyle/>
           <a:p>
             <a:pPr indent="0" marL="0">
               <a:buNone/>
             </a:pPr>
             <a:r>
-              <a:rPr lang="en-US" sz="1400" b="1" dirty="0">
+              <a:rPr lang="en-US" sz="1700" b="1" dirty="0">
                 <a:solidFill>
                   <a:srgbClr val="7B3A8E"/>
                 </a:solidFill>
@@ -7076,14 +6982,14 @@
               <a:buNone/>
             </a:pPr>
             <a:r>
-              <a:rPr lang="en-US" sz="1400" dirty="0">
+              <a:rPr lang="en-US" sz="1700" dirty="0">
                 <a:solidFill>
                   <a:srgbClr val="141B26"/>
                 </a:solidFill>
               </a:rPr>
               <a:t>Light supplies the energy and chlorophyll captures it, but light is not a substance, so it is not a reactant.</a:t>
             </a:r>
-            <a:endParaRPr lang="en-US" sz="1400" dirty="0"/>
+            <a:endParaRPr lang="en-US" sz="1700" dirty="0"/>
           </a:p>
         </p:txBody>
       </p:sp>
@@ -7266,8 +7172,8 @@
         </p:nvSpPr>
         <p:spPr>
           <a:xfrm>
-            <a:off x="548640" y="6053328"/>
-            <a:ext cx="9601200" cy="292608"/>
+            <a:off x="548640" y="6035040"/>
+            <a:ext cx="9601200" cy="310896"/>
           </a:xfrm>
           <a:prstGeom prst="rect">
             <a:avLst/>
@@ -7283,7 +7189,7 @@
               <a:buNone/>
             </a:pPr>
             <a:r>
-              <a:rPr lang="en-US" sz="1200" b="1" dirty="0">
+              <a:rPr lang="en-US" sz="1400" b="1" dirty="0">
                 <a:solidFill>
                   <a:srgbClr val="7B3A8E"/>
                 </a:solidFill>
@@ -7294,14 +7200,14 @@
               <a:buNone/>
             </a:pPr>
             <a:r>
-              <a:rPr lang="en-US" sz="1200" dirty="0">
+              <a:rPr lang="en-US" sz="1400" dirty="0">
                 <a:solidFill>
                   <a:srgbClr val="7B3A8E"/>
                 </a:solidFill>
               </a:rPr>
               <a:t>chlorophyll   ·   chloroplast   ·   limiting factor</a:t>
             </a:r>
-            <a:endParaRPr lang="en-US" sz="1200" dirty="0"/>
+            <a:endParaRPr lang="en-US" sz="1400" dirty="0"/>
           </a:p>
         </p:txBody>
       </p:sp>
@@ -7323,99 +7229,97 @@
           <a:ln/>
         </p:spPr>
         <p:txBody>
-          <a:bodyPr wrap="square" lIns="0" tIns="0" rIns="0" bIns="0" rtlCol="0" anchor="t">
-            <a:normAutofit/>
-          </a:bodyPr>
-          <a:lstStyle/>
-          <a:p>
-            <a:pPr marL="228600" indent="-228600">
+          <a:bodyPr wrap="square" lIns="0" tIns="0" rIns="0" bIns="0" rtlCol="0" anchor="t"/>
+          <a:lstStyle/>
+          <a:p>
+            <a:pPr marL="304800" indent="-304800">
               <a:spcAft>
-                <a:spcPts val="600"/>
+                <a:spcPts val="800"/>
               </a:spcAft>
               <a:buSzPct val="100000"/>
               <a:buChar char="•"/>
             </a:pPr>
             <a:r>
-              <a:rPr lang="en-US" sz="1700" dirty="0">
+              <a:rPr lang="en-US" sz="2000" dirty="0">
                 <a:solidFill>
                   <a:srgbClr val="141B26"/>
                 </a:solidFill>
               </a:rPr>
               <a:t>Chlorophyll, inside chloroplasts, captures the energy transferred by light.</a:t>
             </a:r>
-            <a:endParaRPr lang="en-US" sz="1700" dirty="0"/>
-          </a:p>
-          <a:p>
-            <a:pPr marL="228600" indent="-228600">
+            <a:endParaRPr lang="en-US" sz="2000" dirty="0"/>
+          </a:p>
+          <a:p>
+            <a:pPr marL="304800" indent="-304800">
               <a:spcAft>
-                <a:spcPts val="600"/>
+                <a:spcPts val="800"/>
               </a:spcAft>
               <a:buSzPct val="100000"/>
               <a:buChar char="•"/>
             </a:pPr>
             <a:r>
-              <a:rPr lang="en-US" sz="1700" dirty="0">
+              <a:rPr lang="en-US" sz="2000" dirty="0">
                 <a:solidFill>
                   <a:srgbClr val="141B26"/>
                 </a:solidFill>
               </a:rPr>
               <a:t>That energy is stored in the glucose.</a:t>
             </a:r>
-            <a:endParaRPr lang="en-US" sz="1700" dirty="0"/>
-          </a:p>
-          <a:p>
-            <a:pPr marL="228600" indent="-228600">
+            <a:endParaRPr lang="en-US" sz="2000" dirty="0"/>
+          </a:p>
+          <a:p>
+            <a:pPr marL="304800" indent="-304800">
               <a:spcAft>
-                <a:spcPts val="600"/>
+                <a:spcPts val="800"/>
               </a:spcAft>
               <a:buSzPct val="100000"/>
               <a:buChar char="•"/>
             </a:pPr>
             <a:r>
-              <a:rPr lang="en-US" sz="1700" dirty="0">
+              <a:rPr lang="en-US" sz="2000" dirty="0">
                 <a:solidFill>
                   <a:srgbClr val="141B26"/>
                 </a:solidFill>
               </a:rPr>
               <a:t>Less light, or too little carbon dioxide or water, slows photosynthesis.</a:t>
             </a:r>
-            <a:endParaRPr lang="en-US" sz="1700" dirty="0"/>
-          </a:p>
-          <a:p>
-            <a:pPr marL="228600" indent="-228600">
+            <a:endParaRPr lang="en-US" sz="2000" dirty="0"/>
+          </a:p>
+          <a:p>
+            <a:pPr marL="304800" indent="-304800">
               <a:spcAft>
-                <a:spcPts val="600"/>
+                <a:spcPts val="800"/>
               </a:spcAft>
               <a:buSzPct val="100000"/>
               <a:buChar char="•"/>
             </a:pPr>
             <a:r>
-              <a:rPr lang="en-US" sz="1700" dirty="0">
+              <a:rPr lang="en-US" sz="2000" dirty="0">
                 <a:solidFill>
                   <a:srgbClr val="141B26"/>
                 </a:solidFill>
               </a:rPr>
               <a:t>A variable that slows the rate is a limiting factor.</a:t>
             </a:r>
-            <a:endParaRPr lang="en-US" sz="1700" dirty="0"/>
-          </a:p>
-          <a:p>
-            <a:pPr marL="228600" indent="-228600">
+            <a:endParaRPr lang="en-US" sz="2000" dirty="0"/>
+          </a:p>
+          <a:p>
+            <a:pPr marL="304800" indent="-304800">
               <a:spcAft>
-                <a:spcPts val="600"/>
+                <a:spcPts val="800"/>
               </a:spcAft>
               <a:buSzPct val="100000"/>
               <a:buChar char="•"/>
             </a:pPr>
             <a:r>
-              <a:rPr lang="en-US" sz="1700" dirty="0">
+              <a:rPr lang="en-US" sz="2000" dirty="0">
                 <a:solidFill>
                   <a:srgbClr val="141B26"/>
                 </a:solidFill>
               </a:rPr>
               <a:t>More oxygen bubbles from pondweed means faster photosynthesis.</a:t>
             </a:r>
-            <a:endParaRPr lang="en-US" sz="1700" dirty="0"/>
+            <a:endParaRPr lang="en-US" sz="2000" dirty="0"/>
           </a:p>
         </p:txBody>
       </p:sp>
@@ -7452,7 +7356,7 @@
         <p:spPr>
           <a:xfrm>
             <a:off x="6583680" y="4983480"/>
-            <a:ext cx="5029200" cy="502920"/>
+            <a:ext cx="5029200" cy="548640"/>
           </a:xfrm>
           <a:prstGeom prst="rect">
             <a:avLst/>
@@ -7468,7 +7372,7 @@
               <a:buNone/>
             </a:pPr>
             <a:r>
-              <a:rPr lang="en-US" sz="1100" dirty="0">
+              <a:rPr lang="en-US" sz="1300" dirty="0">
                 <a:solidFill>
                   <a:srgbClr val="141B26"/>
                 </a:solidFill>
@@ -7478,21 +7382,21 @@
             <a:pPr algn="l" indent="0" marL="0">
               <a:buNone/>
             </a:pPr>
-            <a:endParaRPr lang="en-US" sz="1100" dirty="0"/>
+            <a:endParaRPr lang="en-US" sz="1300" dirty="0"/>
           </a:p>
           <a:p>
             <a:pPr algn="l" indent="0" marL="0">
               <a:buNone/>
             </a:pPr>
             <a:r>
-              <a:rPr lang="en-US" sz="800" dirty="0">
+              <a:rPr lang="en-US" sz="900" dirty="0">
                 <a:solidFill>
                   <a:srgbClr val="5B6574"/>
                 </a:solidFill>
               </a:rPr>
               <a:t>Image: Sean Hartnett, CC BY 4.0, via Wikimedia Commons</a:t>
             </a:r>
-            <a:endParaRPr lang="en-US" sz="1100" dirty="0"/>
+            <a:endParaRPr lang="en-US" sz="1300" dirty="0"/>
           </a:p>
         </p:txBody>
       </p:sp>
@@ -7539,16 +7443,14 @@
           <a:ln/>
         </p:spPr>
         <p:txBody>
-          <a:bodyPr wrap="square" lIns="0" tIns="0" rIns="0" bIns="0" rtlCol="0" anchor="ctr">
-            <a:normAutofit/>
-          </a:bodyPr>
+          <a:bodyPr wrap="square" lIns="0" tIns="0" rIns="0" bIns="0" rtlCol="0" anchor="ctr"/>
           <a:lstStyle/>
           <a:p>
             <a:pPr indent="0" marL="0">
               <a:buNone/>
             </a:pPr>
             <a:r>
-              <a:rPr lang="en-US" sz="1400" b="1" dirty="0">
+              <a:rPr lang="en-US" sz="1700" b="1" dirty="0">
                 <a:solidFill>
                   <a:srgbClr val="7B3A8E"/>
                 </a:solidFill>
@@ -7559,14 +7461,14 @@
               <a:buNone/>
             </a:pPr>
             <a:r>
-              <a:rPr lang="en-US" sz="1400" dirty="0">
+              <a:rPr lang="en-US" sz="1700" dirty="0">
                 <a:solidFill>
                   <a:srgbClr val="141B26"/>
                 </a:solidFill>
               </a:rPr>
               <a:t>Rate of photosynthesis is limited by light, carbon dioxide, water and temperature.</a:t>
             </a:r>
-            <a:endParaRPr lang="en-US" sz="1400" dirty="0"/>
+            <a:endParaRPr lang="en-US" sz="1700" dirty="0"/>
           </a:p>
         </p:txBody>
       </p:sp>
@@ -7749,8 +7651,8 @@
         </p:nvSpPr>
         <p:spPr>
           <a:xfrm>
-            <a:off x="548640" y="6053328"/>
-            <a:ext cx="9601200" cy="292608"/>
+            <a:off x="548640" y="6035040"/>
+            <a:ext cx="9601200" cy="310896"/>
           </a:xfrm>
           <a:prstGeom prst="rect">
             <a:avLst/>
@@ -7766,7 +7668,7 @@
               <a:buNone/>
             </a:pPr>
             <a:r>
-              <a:rPr lang="en-US" sz="1200" b="1" dirty="0">
+              <a:rPr lang="en-US" sz="1400" b="1" dirty="0">
                 <a:solidFill>
                   <a:srgbClr val="7B3A8E"/>
                 </a:solidFill>
@@ -7777,14 +7679,14 @@
               <a:buNone/>
             </a:pPr>
             <a:r>
-              <a:rPr lang="en-US" sz="1200" dirty="0">
+              <a:rPr lang="en-US" sz="1400" dirty="0">
                 <a:solidFill>
                   <a:srgbClr val="7B3A8E"/>
                 </a:solidFill>
               </a:rPr>
               <a:t>aerobic respiration</a:t>
             </a:r>
-            <a:endParaRPr lang="en-US" sz="1200" dirty="0"/>
+            <a:endParaRPr lang="en-US" sz="1400" dirty="0"/>
           </a:p>
         </p:txBody>
       </p:sp>
@@ -7891,16 +7793,14 @@
           <a:ln/>
         </p:spPr>
         <p:txBody>
-          <a:bodyPr wrap="square" lIns="0" tIns="0" rIns="0" bIns="0" rtlCol="0" anchor="ctr">
-            <a:normAutofit/>
-          </a:bodyPr>
+          <a:bodyPr wrap="square" lIns="0" tIns="0" rIns="0" bIns="0" rtlCol="0" anchor="ctr"/>
           <a:lstStyle/>
           <a:p>
             <a:pPr indent="0" marL="0">
               <a:buNone/>
             </a:pPr>
             <a:r>
-              <a:rPr lang="en-US" sz="1400" b="1" dirty="0">
+              <a:rPr lang="en-US" sz="1700" b="1" dirty="0">
                 <a:solidFill>
                   <a:srgbClr val="7B3A8E"/>
                 </a:solidFill>
@@ -7911,14 +7811,14 @@
               <a:buNone/>
             </a:pPr>
             <a:r>
-              <a:rPr lang="en-US" sz="1400" dirty="0">
+              <a:rPr lang="en-US" sz="1700" dirty="0">
                 <a:solidFill>
                   <a:srgbClr val="141B26"/>
                 </a:solidFill>
               </a:rPr>
               <a:t>Photosynthesis only in the light, in cells with chloroplasts. Respiration in every cell, all day and all night.</a:t>
             </a:r>
-            <a:endParaRPr lang="en-US" sz="1400" dirty="0"/>
+            <a:endParaRPr lang="en-US" sz="1700" dirty="0"/>
           </a:p>
         </p:txBody>
       </p:sp>
@@ -8118,14 +8018,14 @@
               <a:buNone/>
             </a:pPr>
             <a:r>
-              <a:rPr lang="en-US" sz="1600" dirty="0">
+              <a:rPr lang="en-US" sz="1800" dirty="0">
                 <a:solidFill>
                   <a:srgbClr val="141B26"/>
                 </a:solidFill>
               </a:rPr>
               <a:t>Which line is oxygen, X or Y? Why does X rise during the day and fall after dark?</a:t>
             </a:r>
-            <a:endParaRPr lang="en-US" sz="1600" dirty="0"/>
+            <a:endParaRPr lang="en-US" sz="1800" dirty="0"/>
           </a:p>
         </p:txBody>
       </p:sp>
@@ -8196,16 +8096,14 @@
           <a:ln/>
         </p:spPr>
         <p:txBody>
-          <a:bodyPr wrap="square" lIns="0" tIns="0" rIns="0" bIns="0" rtlCol="0" anchor="ctr">
-            <a:normAutofit/>
-          </a:bodyPr>
+          <a:bodyPr wrap="square" lIns="0" tIns="0" rIns="0" bIns="0" rtlCol="0" anchor="ctr"/>
           <a:lstStyle/>
           <a:p>
             <a:pPr indent="0" marL="0">
               <a:buNone/>
             </a:pPr>
             <a:r>
-              <a:rPr lang="en-US" sz="1400" b="1" dirty="0">
+              <a:rPr lang="en-US" sz="1700" b="1" dirty="0">
                 <a:solidFill>
                   <a:srgbClr val="7B3A8E"/>
                 </a:solidFill>
@@ -8216,14 +8114,14 @@
               <a:buNone/>
             </a:pPr>
             <a:r>
-              <a:rPr lang="en-US" sz="1400" dirty="0">
+              <a:rPr lang="en-US" sz="1700" dirty="0">
                 <a:solidFill>
                   <a:srgbClr val="141B26"/>
                 </a:solidFill>
               </a:rPr>
               <a:t>In daylight a plant makes more oxygen than it uses, so oxygen is given off. At night it only respires, so oxygen falls and carbon dioxide rises.</a:t>
             </a:r>
-            <a:endParaRPr lang="en-US" sz="1400" dirty="0"/>
+            <a:endParaRPr lang="en-US" sz="1700" dirty="0"/>
           </a:p>
         </p:txBody>
       </p:sp>
@@ -8406,8 +8304,8 @@
         </p:nvSpPr>
         <p:spPr>
           <a:xfrm>
-            <a:off x="548640" y="6053328"/>
-            <a:ext cx="9601200" cy="292608"/>
+            <a:off x="548640" y="6035040"/>
+            <a:ext cx="9601200" cy="310896"/>
           </a:xfrm>
           <a:prstGeom prst="rect">
             <a:avLst/>
@@ -8423,7 +8321,7 @@
               <a:buNone/>
             </a:pPr>
             <a:r>
-              <a:rPr lang="en-US" sz="1200" b="1" dirty="0">
+              <a:rPr lang="en-US" sz="1400" b="1" dirty="0">
                 <a:solidFill>
                   <a:srgbClr val="7B3A8E"/>
                 </a:solidFill>
@@ -8434,14 +8332,14 @@
               <a:buNone/>
             </a:pPr>
             <a:r>
-              <a:rPr lang="en-US" sz="1200" dirty="0">
+              <a:rPr lang="en-US" sz="1400" dirty="0">
                 <a:solidFill>
                   <a:srgbClr val="7B3A8E"/>
                 </a:solidFill>
               </a:rPr>
               <a:t>phloem   ·   yield</a:t>
             </a:r>
-            <a:endParaRPr lang="en-US" sz="1200" dirty="0"/>
+            <a:endParaRPr lang="en-US" sz="1400" dirty="0"/>
           </a:p>
         </p:txBody>
       </p:sp>
@@ -8463,81 +8361,79 @@
           <a:ln/>
         </p:spPr>
         <p:txBody>
-          <a:bodyPr wrap="square" lIns="0" tIns="0" rIns="0" bIns="0" rtlCol="0" anchor="t">
-            <a:normAutofit/>
-          </a:bodyPr>
-          <a:lstStyle/>
-          <a:p>
-            <a:pPr marL="228600" indent="-228600">
+          <a:bodyPr wrap="square" lIns="0" tIns="0" rIns="0" bIns="0" rtlCol="0" anchor="t"/>
+          <a:lstStyle/>
+          <a:p>
+            <a:pPr marL="304800" indent="-304800">
               <a:spcAft>
-                <a:spcPts val="600"/>
+                <a:spcPts val="800"/>
               </a:spcAft>
               <a:buSzPct val="100000"/>
               <a:buChar char="•"/>
             </a:pPr>
             <a:r>
-              <a:rPr lang="en-US" sz="1700" dirty="0">
+              <a:rPr lang="en-US" sz="2000" dirty="0">
                 <a:solidFill>
                   <a:srgbClr val="141B26"/>
                 </a:solidFill>
               </a:rPr>
               <a:t>Glucose is turned into sugars that dissolve in water.</a:t>
             </a:r>
-            <a:endParaRPr lang="en-US" sz="1700" dirty="0"/>
-          </a:p>
-          <a:p>
-            <a:pPr marL="228600" indent="-228600">
+            <a:endParaRPr lang="en-US" sz="2000" dirty="0"/>
+          </a:p>
+          <a:p>
+            <a:pPr marL="304800" indent="-304800">
               <a:spcAft>
-                <a:spcPts val="600"/>
+                <a:spcPts val="800"/>
               </a:spcAft>
               <a:buSzPct val="100000"/>
               <a:buChar char="•"/>
             </a:pPr>
             <a:r>
-              <a:rPr lang="en-US" sz="1700" dirty="0">
+              <a:rPr lang="en-US" sz="2000" dirty="0">
                 <a:solidFill>
                   <a:srgbClr val="141B26"/>
                 </a:solidFill>
               </a:rPr>
               <a:t>Phloem vessels, chains of living cells, carry the sugar solution to every part of the plant.</a:t>
             </a:r>
-            <a:endParaRPr lang="en-US" sz="1700" dirty="0"/>
-          </a:p>
-          <a:p>
-            <a:pPr marL="228600" indent="-228600">
+            <a:endParaRPr lang="en-US" sz="2000" dirty="0"/>
+          </a:p>
+          <a:p>
+            <a:pPr marL="304800" indent="-304800">
               <a:spcAft>
-                <a:spcPts val="600"/>
+                <a:spcPts val="800"/>
               </a:spcAft>
               <a:buSzPct val="100000"/>
               <a:buChar char="•"/>
             </a:pPr>
             <a:r>
-              <a:rPr lang="en-US" sz="1700" dirty="0">
+              <a:rPr lang="en-US" sz="2000" dirty="0">
                 <a:solidFill>
                   <a:srgbClr val="141B26"/>
                 </a:solidFill>
               </a:rPr>
               <a:t>Root cells use this sugar for respiration. They get oxygen from air spaces in the soil.</a:t>
             </a:r>
-            <a:endParaRPr lang="en-US" sz="1700" dirty="0"/>
-          </a:p>
-          <a:p>
-            <a:pPr marL="228600" indent="-228600">
+            <a:endParaRPr lang="en-US" sz="2000" dirty="0"/>
+          </a:p>
+          <a:p>
+            <a:pPr marL="304800" indent="-304800">
               <a:spcAft>
-                <a:spcPts val="600"/>
+                <a:spcPts val="800"/>
               </a:spcAft>
               <a:buSzPct val="100000"/>
               <a:buChar char="•"/>
             </a:pPr>
             <a:r>
-              <a:rPr lang="en-US" sz="1700" dirty="0">
+              <a:rPr lang="en-US" sz="2000" dirty="0">
                 <a:solidFill>
                   <a:srgbClr val="141B26"/>
                 </a:solidFill>
               </a:rPr>
               <a:t>Waterlogged soil has no air, so roots cannot respire and the plant can die.</a:t>
             </a:r>
-            <a:endParaRPr lang="en-US" sz="1700" dirty="0"/>
+            <a:endParaRPr lang="en-US" sz="2000" dirty="0"/>
           </a:p>
         </p:txBody>
       </p:sp>
@@ -8584,16 +8480,14 @@
           <a:ln/>
         </p:spPr>
         <p:txBody>
-          <a:bodyPr wrap="square" lIns="0" tIns="0" rIns="0" bIns="0" rtlCol="0" anchor="ctr">
-            <a:normAutofit/>
-          </a:bodyPr>
+          <a:bodyPr wrap="square" lIns="0" tIns="0" rIns="0" bIns="0" rtlCol="0" anchor="ctr"/>
           <a:lstStyle/>
           <a:p>
             <a:pPr indent="0" marL="0">
               <a:buNone/>
             </a:pPr>
             <a:r>
-              <a:rPr lang="en-US" sz="1400" b="1" dirty="0">
+              <a:rPr lang="en-US" sz="1700" b="1" dirty="0">
                 <a:solidFill>
                   <a:srgbClr val="7B3A8E"/>
                 </a:solidFill>
@@ -8604,14 +8498,14 @@
               <a:buNone/>
             </a:pPr>
             <a:r>
-              <a:rPr lang="en-US" sz="1400" dirty="0">
+              <a:rPr lang="en-US" sz="1700" dirty="0">
                 <a:solidFill>
                   <a:srgbClr val="141B26"/>
                 </a:solidFill>
               </a:rPr>
               <a:t>Roots do not photosynthesise, but they respire, so they need sugar from the phloem and oxygen from the soil.</a:t>
             </a:r>
-            <a:endParaRPr lang="en-US" sz="1400" dirty="0"/>
+            <a:endParaRPr lang="en-US" sz="1700" dirty="0"/>
           </a:p>
         </p:txBody>
       </p:sp>
